--- a/docs/investor-deck/ai-fixly-investor-deck.pptx
+++ b/docs/investor-deck/ai-fixly-investor-deck.pptx
@@ -8719,11 +8719,11 @@
         <p:spPr>
           <a:xfrm>
             <a:off x="557784" y="1289304"/>
-            <a:ext cx="1753819" cy="3364992"/>
+            <a:ext cx="1693469" cy="3364992"/>
           </a:xfrm>
           <a:prstGeom prst="roundRect">
             <a:avLst>
-              <a:gd name="adj" fmla="val 11470"/>
+              <a:gd name="adj" fmla="val 11879"/>
             </a:avLst>
           </a:prstGeom>
           <a:solidFill>
@@ -8746,7 +8746,7 @@
       </p:sp>
       <p:pic>
         <p:nvPicPr>
-          <p:cNvPr id="5" name="Image 0" descr="C:\Users\roeea\OneDrive\Documents\Github\ai-fixly\docs\screenshots\mock-home.png">    </p:cNvPr>
+          <p:cNvPr id="5" name="Image 0" descr="C:\Users\roeea\OneDrive\Documents\Github\ai-fixly\.claude\worktrees\agitated-zhukovsky-10d815\docs\screenshots\mock-home-he.png">    </p:cNvPr>
           <p:cNvPicPr>
             <a:picLocks noChangeAspect="1"/>
           </p:cNvPicPr>
@@ -8760,7 +8760,7 @@
         <p:spPr>
           <a:xfrm>
             <a:off x="640080" y="1371600"/>
-            <a:ext cx="1589227" cy="3200400"/>
+            <a:ext cx="1528877" cy="3200400"/>
           </a:xfrm>
           <a:prstGeom prst="rect">
             <a:avLst/>
@@ -9369,11 +9369,11 @@
         <p:spPr>
           <a:xfrm>
             <a:off x="374904" y="1197864"/>
-            <a:ext cx="1753819" cy="3364992"/>
+            <a:ext cx="1693469" cy="3364992"/>
           </a:xfrm>
           <a:prstGeom prst="roundRect">
             <a:avLst>
-              <a:gd name="adj" fmla="val 11470"/>
+              <a:gd name="adj" fmla="val 11879"/>
             </a:avLst>
           </a:prstGeom>
           <a:solidFill>
@@ -9396,7 +9396,7 @@
       </p:sp>
       <p:pic>
         <p:nvPicPr>
-          <p:cNvPr id="4" name="Image 0" descr="C:\Users\roeea\OneDrive\Documents\Github\ai-fixly\docs\screenshots\mock-capture.png">    </p:cNvPr>
+          <p:cNvPr id="4" name="Image 0" descr="C:\Users\roeea\OneDrive\Documents\Github\ai-fixly\.claude\worktrees\agitated-zhukovsky-10d815\docs\screenshots\mock-capture-he.png">    </p:cNvPr>
           <p:cNvPicPr>
             <a:picLocks noChangeAspect="1"/>
           </p:cNvPicPr>
@@ -9410,7 +9410,7 @@
         <p:spPr>
           <a:xfrm>
             <a:off x="457200" y="1280160"/>
-            <a:ext cx="1589227" cy="3200400"/>
+            <a:ext cx="1528877" cy="3200400"/>
           </a:xfrm>
           <a:prstGeom prst="rect">
             <a:avLst/>
@@ -9426,7 +9426,7 @@
         <p:spPr>
           <a:xfrm>
             <a:off x="182880" y="4709160"/>
-            <a:ext cx="2137728" cy="320040"/>
+            <a:ext cx="2077720" cy="320040"/>
           </a:xfrm>
           <a:prstGeom prst="rect">
             <a:avLst/>
@@ -9464,12 +9464,12 @@
         </p:nvSpPr>
         <p:spPr>
           <a:xfrm>
-            <a:off x="3695160" y="1197864"/>
-            <a:ext cx="1753819" cy="3364992"/>
+            <a:off x="3725164" y="1197864"/>
+            <a:ext cx="1693469" cy="3364992"/>
           </a:xfrm>
           <a:prstGeom prst="roundRect">
             <a:avLst>
-              <a:gd name="adj" fmla="val 11470"/>
+              <a:gd name="adj" fmla="val 11879"/>
             </a:avLst>
           </a:prstGeom>
           <a:solidFill>
@@ -9492,7 +9492,7 @@
       </p:sp>
       <p:pic>
         <p:nvPicPr>
-          <p:cNvPr id="7" name="Image 1" descr="C:\Users\roeea\OneDrive\Documents\Github\ai-fixly\docs\screenshots\mock-confirm.png">    </p:cNvPr>
+          <p:cNvPr id="7" name="Image 1" descr="C:\Users\roeea\OneDrive\Documents\Github\ai-fixly\.claude\worktrees\agitated-zhukovsky-10d815\docs\screenshots\mock-confirm-he.png">    </p:cNvPr>
           <p:cNvPicPr>
             <a:picLocks noChangeAspect="1"/>
           </p:cNvPicPr>
@@ -9505,8 +9505,8 @@
         </p:blipFill>
         <p:spPr>
           <a:xfrm>
-            <a:off x="3777456" y="1280160"/>
-            <a:ext cx="1589227" cy="3200400"/>
+            <a:off x="3807460" y="1280160"/>
+            <a:ext cx="1528877" cy="3200400"/>
           </a:xfrm>
           <a:prstGeom prst="rect">
             <a:avLst/>
@@ -9521,8 +9521,8 @@
         </p:nvSpPr>
         <p:spPr>
           <a:xfrm>
-            <a:off x="3503136" y="4709160"/>
-            <a:ext cx="2137728" cy="320040"/>
+            <a:off x="3533140" y="4709160"/>
+            <a:ext cx="2077720" cy="320040"/>
           </a:xfrm>
           <a:prstGeom prst="rect">
             <a:avLst/>
@@ -9560,12 +9560,12 @@
         </p:nvSpPr>
         <p:spPr>
           <a:xfrm>
-            <a:off x="7015417" y="1197864"/>
-            <a:ext cx="1753819" cy="3364992"/>
+            <a:off x="7075424" y="1197864"/>
+            <a:ext cx="1693469" cy="3364992"/>
           </a:xfrm>
           <a:prstGeom prst="roundRect">
             <a:avLst>
-              <a:gd name="adj" fmla="val 11470"/>
+              <a:gd name="adj" fmla="val 11879"/>
             </a:avLst>
           </a:prstGeom>
           <a:solidFill>
@@ -9588,7 +9588,7 @@
       </p:sp>
       <p:pic>
         <p:nvPicPr>
-          <p:cNvPr id="10" name="Image 2" descr="C:\Users\roeea\OneDrive\Documents\Github\ai-fixly\docs\screenshots\mock-request-details.png">    </p:cNvPr>
+          <p:cNvPr id="10" name="Image 2" descr="C:\Users\roeea\OneDrive\Documents\Github\ai-fixly\.claude\worktrees\agitated-zhukovsky-10d815\docs\screenshots\mock-request-details-he.png">    </p:cNvPr>
           <p:cNvPicPr>
             <a:picLocks noChangeAspect="1"/>
           </p:cNvPicPr>
@@ -9601,8 +9601,8 @@
         </p:blipFill>
         <p:spPr>
           <a:xfrm>
-            <a:off x="7097713" y="1280160"/>
-            <a:ext cx="1589227" cy="3200400"/>
+            <a:off x="7157720" y="1280160"/>
+            <a:ext cx="1528877" cy="3200400"/>
           </a:xfrm>
           <a:prstGeom prst="rect">
             <a:avLst/>
@@ -9617,8 +9617,8 @@
         </p:nvSpPr>
         <p:spPr>
           <a:xfrm>
-            <a:off x="6823393" y="4709160"/>
-            <a:ext cx="2137728" cy="320040"/>
+            <a:off x="6883400" y="4709160"/>
+            <a:ext cx="2077720" cy="320040"/>
           </a:xfrm>
           <a:prstGeom prst="rect">
             <a:avLst/>
@@ -9863,11 +9863,11 @@
         <p:spPr>
           <a:xfrm>
             <a:off x="649224" y="1289304"/>
-            <a:ext cx="1753819" cy="3364992"/>
+            <a:ext cx="1693469" cy="3364992"/>
           </a:xfrm>
           <a:prstGeom prst="roundRect">
             <a:avLst>
-              <a:gd name="adj" fmla="val 11470"/>
+              <a:gd name="adj" fmla="val 11879"/>
             </a:avLst>
           </a:prstGeom>
           <a:solidFill>
@@ -9890,7 +9890,7 @@
       </p:sp>
       <p:pic>
         <p:nvPicPr>
-          <p:cNvPr id="5" name="Image 0" descr="C:\Users\roeea\OneDrive\Documents\Github\ai-fixly\docs\screenshots\mock-whatsapp-msg.png">    </p:cNvPr>
+          <p:cNvPr id="5" name="Image 0" descr="C:\Users\roeea\OneDrive\Documents\Github\ai-fixly\.claude\worktrees\agitated-zhukovsky-10d815\docs\screenshots\mock-whatsapp-msg-he.png">    </p:cNvPr>
           <p:cNvPicPr>
             <a:picLocks noChangeAspect="1"/>
           </p:cNvPicPr>
@@ -9904,7 +9904,7 @@
         <p:spPr>
           <a:xfrm>
             <a:off x="731520" y="1371600"/>
-            <a:ext cx="1589227" cy="3200400"/>
+            <a:ext cx="1528877" cy="3200400"/>
           </a:xfrm>
           <a:prstGeom prst="rect">
             <a:avLst/>
@@ -10538,11 +10538,11 @@
         <p:spPr>
           <a:xfrm>
             <a:off x="374904" y="1289304"/>
-            <a:ext cx="1299362" cy="2450592"/>
+            <a:ext cx="1256386" cy="2450592"/>
           </a:xfrm>
           <a:prstGeom prst="roundRect">
             <a:avLst>
-              <a:gd name="adj" fmla="val 15482"/>
+              <a:gd name="adj" fmla="val 16012"/>
             </a:avLst>
           </a:prstGeom>
           <a:solidFill>
@@ -10565,7 +10565,7 @@
       </p:sp>
       <p:pic>
         <p:nvPicPr>
-          <p:cNvPr id="5" name="Image 0" descr="C:\Users\roeea\OneDrive\Documents\Github\ai-fixly\docs\screenshots\mock-home.png">    </p:cNvPr>
+          <p:cNvPr id="5" name="Image 0" descr="C:\Users\roeea\OneDrive\Documents\Github\ai-fixly\.claude\worktrees\agitated-zhukovsky-10d815\docs\screenshots\mock-home-he.png">    </p:cNvPr>
           <p:cNvPicPr>
             <a:picLocks noChangeAspect="1"/>
           </p:cNvPicPr>
@@ -10579,7 +10579,7 @@
         <p:spPr>
           <a:xfrm>
             <a:off x="457200" y="1371600"/>
-            <a:ext cx="1134770" cy="2286000"/>
+            <a:ext cx="1091794" cy="2286000"/>
           </a:xfrm>
           <a:prstGeom prst="rect">
             <a:avLst/>
@@ -10595,7 +10595,7 @@
         <p:spPr>
           <a:xfrm>
             <a:off x="274320" y="3794760"/>
-            <a:ext cx="1500823" cy="274320"/>
+            <a:ext cx="1457960" cy="274320"/>
           </a:xfrm>
           <a:prstGeom prst="rect">
             <a:avLst/>
@@ -10633,12 +10633,12 @@
         </p:nvSpPr>
         <p:spPr>
           <a:xfrm>
-            <a:off x="1793812" y="1289304"/>
-            <a:ext cx="1299362" cy="2450592"/>
+            <a:off x="1802384" y="1289304"/>
+            <a:ext cx="1256386" cy="2450592"/>
           </a:xfrm>
           <a:prstGeom prst="roundRect">
             <a:avLst>
-              <a:gd name="adj" fmla="val 15482"/>
+              <a:gd name="adj" fmla="val 16012"/>
             </a:avLst>
           </a:prstGeom>
           <a:solidFill>
@@ -10661,7 +10661,7 @@
       </p:sp>
       <p:pic>
         <p:nvPicPr>
-          <p:cNvPr id="8" name="Image 1" descr="C:\Users\roeea\OneDrive\Documents\Github\ai-fixly\docs\screenshots\mock-my-requests.png">    </p:cNvPr>
+          <p:cNvPr id="8" name="Image 1" descr="C:\Users\roeea\OneDrive\Documents\Github\ai-fixly\.claude\worktrees\agitated-zhukovsky-10d815\docs\screenshots\mock-my-requests-he.png">    </p:cNvPr>
           <p:cNvPicPr>
             <a:picLocks noChangeAspect="1"/>
           </p:cNvPicPr>
@@ -10674,8 +10674,8 @@
         </p:blipFill>
         <p:spPr>
           <a:xfrm>
-            <a:off x="1876108" y="1371600"/>
-            <a:ext cx="1134770" cy="2286000"/>
+            <a:off x="1884680" y="1371600"/>
+            <a:ext cx="1091794" cy="2286000"/>
           </a:xfrm>
           <a:prstGeom prst="rect">
             <a:avLst/>
@@ -10690,8 +10690,8 @@
         </p:nvSpPr>
         <p:spPr>
           <a:xfrm>
-            <a:off x="1693228" y="3794760"/>
-            <a:ext cx="1500823" cy="274320"/>
+            <a:off x="1701800" y="3794760"/>
+            <a:ext cx="1457960" cy="274320"/>
           </a:xfrm>
           <a:prstGeom prst="rect">
             <a:avLst/>
@@ -10729,12 +10729,12 @@
         </p:nvSpPr>
         <p:spPr>
           <a:xfrm>
-            <a:off x="3212719" y="1289304"/>
-            <a:ext cx="1299362" cy="2450592"/>
+            <a:off x="3229864" y="1289304"/>
+            <a:ext cx="1256386" cy="2450592"/>
           </a:xfrm>
           <a:prstGeom prst="roundRect">
             <a:avLst>
-              <a:gd name="adj" fmla="val 15482"/>
+              <a:gd name="adj" fmla="val 16012"/>
             </a:avLst>
           </a:prstGeom>
           <a:solidFill>
@@ -10757,7 +10757,7 @@
       </p:sp>
       <p:pic>
         <p:nvPicPr>
-          <p:cNvPr id="11" name="Image 2" descr="C:\Users\roeea\OneDrive\Documents\Github\ai-fixly\docs\screenshots\mock-confirm.png">    </p:cNvPr>
+          <p:cNvPr id="11" name="Image 2" descr="C:\Users\roeea\OneDrive\Documents\Github\ai-fixly\.claude\worktrees\agitated-zhukovsky-10d815\docs\screenshots\mock-request-details-he.png">    </p:cNvPr>
           <p:cNvPicPr>
             <a:picLocks noChangeAspect="1"/>
           </p:cNvPicPr>
@@ -10770,8 +10770,8 @@
         </p:blipFill>
         <p:spPr>
           <a:xfrm>
-            <a:off x="3295015" y="1371600"/>
-            <a:ext cx="1134770" cy="2286000"/>
+            <a:off x="3312160" y="1371600"/>
+            <a:ext cx="1091794" cy="2286000"/>
           </a:xfrm>
           <a:prstGeom prst="rect">
             <a:avLst/>
@@ -10786,8 +10786,8 @@
         </p:nvSpPr>
         <p:spPr>
           <a:xfrm>
-            <a:off x="3112135" y="3794760"/>
-            <a:ext cx="1500823" cy="274320"/>
+            <a:off x="3129280" y="3794760"/>
+            <a:ext cx="1457960" cy="274320"/>
           </a:xfrm>
           <a:prstGeom prst="rect">
             <a:avLst/>
@@ -10811,7 +10811,7 @@
                 <a:ea typeface="Calibri" pitchFamily="34" charset="-122"/>
                 <a:cs typeface="Calibri" pitchFamily="34" charset="-120"/>
               </a:rPr>
-              <a:t>AI confirm</a:t>
+              <a:t>Live quotes</a:t>
             </a:r>
             <a:endParaRPr lang="en-US" sz="1000" dirty="0"/>
           </a:p>
@@ -10825,12 +10825,12 @@
         </p:nvSpPr>
         <p:spPr>
           <a:xfrm>
-            <a:off x="4631627" y="1289304"/>
-            <a:ext cx="1299362" cy="2450592"/>
+            <a:off x="4657344" y="1289304"/>
+            <a:ext cx="1256386" cy="2450592"/>
           </a:xfrm>
           <a:prstGeom prst="roundRect">
             <a:avLst>
-              <a:gd name="adj" fmla="val 15482"/>
+              <a:gd name="adj" fmla="val 16012"/>
             </a:avLst>
           </a:prstGeom>
           <a:solidFill>
@@ -10853,7 +10853,7 @@
       </p:sp>
       <p:pic>
         <p:nvPicPr>
-          <p:cNvPr id="14" name="Image 3" descr="C:\Users\roeea\OneDrive\Documents\Github\ai-fixly\docs\screenshots\mock-selected.png">    </p:cNvPr>
+          <p:cNvPr id="14" name="Image 3" descr="C:\Users\roeea\OneDrive\Documents\Github\ai-fixly\.claude\worktrees\agitated-zhukovsky-10d815\docs\screenshots\mock-selected-he.png">    </p:cNvPr>
           <p:cNvPicPr>
             <a:picLocks noChangeAspect="1"/>
           </p:cNvPicPr>
@@ -10866,8 +10866,8 @@
         </p:blipFill>
         <p:spPr>
           <a:xfrm>
-            <a:off x="4713923" y="1371600"/>
-            <a:ext cx="1134770" cy="2286000"/>
+            <a:off x="4739640" y="1371600"/>
+            <a:ext cx="1091794" cy="2286000"/>
           </a:xfrm>
           <a:prstGeom prst="rect">
             <a:avLst/>
@@ -10882,8 +10882,8 @@
         </p:nvSpPr>
         <p:spPr>
           <a:xfrm>
-            <a:off x="4531043" y="3794760"/>
-            <a:ext cx="1500823" cy="274320"/>
+            <a:off x="4556760" y="3794760"/>
+            <a:ext cx="1457960" cy="274320"/>
           </a:xfrm>
           <a:prstGeom prst="rect">
             <a:avLst/>
@@ -10921,12 +10921,12 @@
         </p:nvSpPr>
         <p:spPr>
           <a:xfrm>
-            <a:off x="6050534" y="1289304"/>
-            <a:ext cx="1299362" cy="2450592"/>
+            <a:off x="6084824" y="1289304"/>
+            <a:ext cx="1256386" cy="2450592"/>
           </a:xfrm>
           <a:prstGeom prst="roundRect">
             <a:avLst>
-              <a:gd name="adj" fmla="val 15482"/>
+              <a:gd name="adj" fmla="val 16012"/>
             </a:avLst>
           </a:prstGeom>
           <a:solidFill>
@@ -10949,7 +10949,7 @@
       </p:sp>
       <p:pic>
         <p:nvPicPr>
-          <p:cNvPr id="17" name="Image 4" descr="C:\Users\roeea\OneDrive\Documents\Github\ai-fixly\docs\screenshots\mock-provider-quote.png">    </p:cNvPr>
+          <p:cNvPr id="17" name="Image 4" descr="C:\Users\roeea\OneDrive\Documents\Github\ai-fixly\.claude\worktrees\agitated-zhukovsky-10d815\docs\screenshots\mock-whatsapp-msg-he.png">    </p:cNvPr>
           <p:cNvPicPr>
             <a:picLocks noChangeAspect="1"/>
           </p:cNvPicPr>
@@ -10962,8 +10962,8 @@
         </p:blipFill>
         <p:spPr>
           <a:xfrm>
-            <a:off x="6132830" y="1371600"/>
-            <a:ext cx="1134770" cy="2286000"/>
+            <a:off x="6167120" y="1371600"/>
+            <a:ext cx="1091794" cy="2286000"/>
           </a:xfrm>
           <a:prstGeom prst="rect">
             <a:avLst/>
@@ -10978,8 +10978,8 @@
         </p:nvSpPr>
         <p:spPr>
           <a:xfrm>
-            <a:off x="5949950" y="3794760"/>
-            <a:ext cx="1500823" cy="274320"/>
+            <a:off x="5984240" y="3794760"/>
+            <a:ext cx="1457960" cy="274320"/>
           </a:xfrm>
           <a:prstGeom prst="rect">
             <a:avLst/>
@@ -11003,7 +11003,7 @@
                 <a:ea typeface="Calibri" pitchFamily="34" charset="-122"/>
                 <a:cs typeface="Calibri" pitchFamily="34" charset="-120"/>
               </a:rPr>
-              <a:t>Pro quote form</a:t>
+              <a:t>Provider DM</a:t>
             </a:r>
             <a:endParaRPr lang="en-US" sz="1000" dirty="0"/>
           </a:p>
@@ -11017,12 +11017,12 @@
         </p:nvSpPr>
         <p:spPr>
           <a:xfrm>
-            <a:off x="7469442" y="1289304"/>
-            <a:ext cx="1299362" cy="2450592"/>
+            <a:off x="7512304" y="1289304"/>
+            <a:ext cx="1256386" cy="2450592"/>
           </a:xfrm>
           <a:prstGeom prst="roundRect">
             <a:avLst>
-              <a:gd name="adj" fmla="val 15482"/>
+              <a:gd name="adj" fmla="val 16012"/>
             </a:avLst>
           </a:prstGeom>
           <a:solidFill>
@@ -11045,7 +11045,7 @@
       </p:sp>
       <p:pic>
         <p:nvPicPr>
-          <p:cNvPr id="20" name="Image 5" descr="C:\Users\roeea\OneDrive\Documents\Github\ai-fixly\docs\screenshots\mock-review.png">    </p:cNvPr>
+          <p:cNvPr id="20" name="Image 5" descr="C:\Users\roeea\OneDrive\Documents\Github\ai-fixly\.claude\worktrees\agitated-zhukovsky-10d815\docs\screenshots\mock-provider-quote-he.png">    </p:cNvPr>
           <p:cNvPicPr>
             <a:picLocks noChangeAspect="1"/>
           </p:cNvPicPr>
@@ -11058,8 +11058,8 @@
         </p:blipFill>
         <p:spPr>
           <a:xfrm>
-            <a:off x="7551738" y="1371600"/>
-            <a:ext cx="1134770" cy="2286000"/>
+            <a:off x="7594600" y="1371600"/>
+            <a:ext cx="1091794" cy="2286000"/>
           </a:xfrm>
           <a:prstGeom prst="rect">
             <a:avLst/>
@@ -11074,8 +11074,8 @@
         </p:nvSpPr>
         <p:spPr>
           <a:xfrm>
-            <a:off x="7368858" y="3794760"/>
-            <a:ext cx="1500823" cy="274320"/>
+            <a:off x="7411720" y="3794760"/>
+            <a:ext cx="1457960" cy="274320"/>
           </a:xfrm>
           <a:prstGeom prst="rect">
             <a:avLst/>
@@ -11099,7 +11099,7 @@
                 <a:ea typeface="Calibri" pitchFamily="34" charset="-122"/>
                 <a:cs typeface="Calibri" pitchFamily="34" charset="-120"/>
               </a:rPr>
-              <a:t>Review + rating</a:t>
+              <a:t>Pro quote form</a:t>
             </a:r>
             <a:endParaRPr lang="en-US" sz="1000" dirty="0"/>
           </a:p>

--- a/docs/investor-deck/ai-fixly-investor-deck.pptx
+++ b/docs/investor-deck/ai-fixly-investor-deck.pptx
@@ -17,11 +17,9 @@
     <p:sldId id="265" r:id="rId11"/>
     <p:sldId id="266" r:id="rId12"/>
     <p:sldId id="267" r:id="rId13"/>
-    <p:sldId id="268" r:id="rId14"/>
-    <p:sldId id="269" r:id="rId15"/>
   </p:sldIdLst>
   <p:notesMasterIdLst>
-    <p:notesMasterId r:id="rId16"/>
+    <p:notesMasterId r:id="rId14"/>
   </p:notesMasterIdLst>
   <p:sldSz cx="9144000" cy="5143500"/>
   <p:notesSz cx="5143500" cy="9144000"/>
@@ -803,182 +801,6 @@
             <a:fld id="{F7021451-1387-4CA6-816F-3879F97B5CBC}" type="slidenum">
               <a:rPr lang="en-US"/>
               <a:t>12</a:t>
-            </a:fld>
-            <a:endParaRPr lang="en-US"/>
-          </a:p>
-        </p:txBody>
-      </p:sp>
-    </p:spTree>
-    <p:extLst>
-      <p:ext uri="{BB962C8B-B14F-4D97-AF65-F5344CB8AC3E}">
-        <p14:creationId xmlns:p14="http://schemas.microsoft.com/office/powerpoint/2010/main" val="1024086991"/>
-      </p:ext>
-    </p:extLst>
-  </p:cSld>
-  <p:clrMapOvr>
-    <a:masterClrMapping/>
-  </p:clrMapOvr>
-</p:notes>
-</file>
-
-<file path=ppt/notesSlides/notesSlide13.xml><?xml version="1.0" encoding="utf-8"?>
-<p:notes xmlns:a="http://schemas.openxmlformats.org/drawingml/2006/main" xmlns:r="http://schemas.openxmlformats.org/officeDocument/2006/relationships" xmlns:p="http://schemas.openxmlformats.org/presentationml/2006/main">
-  <p:cSld>
-    <p:spTree>
-      <p:nvGrpSpPr>
-        <p:cNvPr id="1" name=""/>
-        <p:cNvGrpSpPr/>
-        <p:nvPr/>
-      </p:nvGrpSpPr>
-      <p:grpSpPr>
-        <a:xfrm>
-          <a:off x="0" y="0"/>
-          <a:ext cx="0" cy="0"/>
-          <a:chOff x="0" y="0"/>
-          <a:chExt cx="0" cy="0"/>
-        </a:xfrm>
-      </p:grpSpPr>
-      <p:sp>
-        <p:nvSpPr>
-          <p:cNvPr id="2" name="Slide Image Placeholder 1"/>
-          <p:cNvSpPr>
-            <a:spLocks noGrp="1" noRot="1" noChangeAspect="1"/>
-          </p:cNvSpPr>
-          <p:nvPr>
-            <p:ph type="sldImg"/>
-          </p:nvPr>
-        </p:nvSpPr>
-        <p:spPr/>
-      </p:sp>
-      <p:sp>
-        <p:nvSpPr>
-          <p:cNvPr id="3" name="Notes Placeholder 2"/>
-          <p:cNvSpPr>
-            <a:spLocks noGrp="1"/>
-          </p:cNvSpPr>
-          <p:nvPr>
-            <p:ph type="body" idx="1"/>
-          </p:nvPr>
-        </p:nvSpPr>
-        <p:spPr/>
-        <p:txBody>
-          <a:bodyPr/>
-          <a:lstStyle/>
-          <a:p>
-            <a:r>
-              <a:rPr lang="en-US" dirty="0"/>
-              <a:t/>
-            </a:r>
-            <a:endParaRPr lang="en-US" dirty="0"/>
-          </a:p>
-        </p:txBody>
-      </p:sp>
-      <p:sp>
-        <p:nvSpPr>
-          <p:cNvPr id="4" name="Slide Number Placeholder 3"/>
-          <p:cNvSpPr>
-            <a:spLocks noGrp="1"/>
-          </p:cNvSpPr>
-          <p:nvPr>
-            <p:ph type="sldNum" sz="quarter" idx="10"/>
-          </p:nvPr>
-        </p:nvSpPr>
-        <p:spPr/>
-        <p:txBody>
-          <a:bodyPr/>
-          <a:lstStyle/>
-          <a:p>
-            <a:fld id="{F7021451-1387-4CA6-816F-3879F97B5CBC}" type="slidenum">
-              <a:rPr lang="en-US"/>
-              <a:t>13</a:t>
-            </a:fld>
-            <a:endParaRPr lang="en-US"/>
-          </a:p>
-        </p:txBody>
-      </p:sp>
-    </p:spTree>
-    <p:extLst>
-      <p:ext uri="{BB962C8B-B14F-4D97-AF65-F5344CB8AC3E}">
-        <p14:creationId xmlns:p14="http://schemas.microsoft.com/office/powerpoint/2010/main" val="1024086991"/>
-      </p:ext>
-    </p:extLst>
-  </p:cSld>
-  <p:clrMapOvr>
-    <a:masterClrMapping/>
-  </p:clrMapOvr>
-</p:notes>
-</file>
-
-<file path=ppt/notesSlides/notesSlide14.xml><?xml version="1.0" encoding="utf-8"?>
-<p:notes xmlns:a="http://schemas.openxmlformats.org/drawingml/2006/main" xmlns:r="http://schemas.openxmlformats.org/officeDocument/2006/relationships" xmlns:p="http://schemas.openxmlformats.org/presentationml/2006/main">
-  <p:cSld>
-    <p:spTree>
-      <p:nvGrpSpPr>
-        <p:cNvPr id="1" name=""/>
-        <p:cNvGrpSpPr/>
-        <p:nvPr/>
-      </p:nvGrpSpPr>
-      <p:grpSpPr>
-        <a:xfrm>
-          <a:off x="0" y="0"/>
-          <a:ext cx="0" cy="0"/>
-          <a:chOff x="0" y="0"/>
-          <a:chExt cx="0" cy="0"/>
-        </a:xfrm>
-      </p:grpSpPr>
-      <p:sp>
-        <p:nvSpPr>
-          <p:cNvPr id="2" name="Slide Image Placeholder 1"/>
-          <p:cNvSpPr>
-            <a:spLocks noGrp="1" noRot="1" noChangeAspect="1"/>
-          </p:cNvSpPr>
-          <p:nvPr>
-            <p:ph type="sldImg"/>
-          </p:nvPr>
-        </p:nvSpPr>
-        <p:spPr/>
-      </p:sp>
-      <p:sp>
-        <p:nvSpPr>
-          <p:cNvPr id="3" name="Notes Placeholder 2"/>
-          <p:cNvSpPr>
-            <a:spLocks noGrp="1"/>
-          </p:cNvSpPr>
-          <p:nvPr>
-            <p:ph type="body" idx="1"/>
-          </p:nvPr>
-        </p:nvSpPr>
-        <p:spPr/>
-        <p:txBody>
-          <a:bodyPr/>
-          <a:lstStyle/>
-          <a:p>
-            <a:r>
-              <a:rPr lang="en-US" dirty="0"/>
-              <a:t/>
-            </a:r>
-            <a:endParaRPr lang="en-US" dirty="0"/>
-          </a:p>
-        </p:txBody>
-      </p:sp>
-      <p:sp>
-        <p:nvSpPr>
-          <p:cNvPr id="4" name="Slide Number Placeholder 3"/>
-          <p:cNvSpPr>
-            <a:spLocks noGrp="1"/>
-          </p:cNvSpPr>
-          <p:nvPr>
-            <p:ph type="sldNum" sz="quarter" idx="10"/>
-          </p:nvPr>
-        </p:nvSpPr>
-        <p:spPr/>
-        <p:txBody>
-          <a:bodyPr/>
-          <a:lstStyle/>
-          <a:p>
-            <a:fld id="{F7021451-1387-4CA6-816F-3879F97B5CBC}" type="slidenum">
-              <a:rPr lang="en-US"/>
-              <a:t>14</a:t>
             </a:fld>
             <a:endParaRPr lang="en-US"/>
           </a:p>
@@ -2991,7 +2813,7 @@
                 <a:ea typeface="Arial" pitchFamily="34" charset="-122"/>
                 <a:cs typeface="Arial" pitchFamily="34" charset="-120"/>
               </a:rPr>
-              <a:t>10 / 14</a:t>
+              <a:t>10 / 12</a:t>
             </a:r>
             <a:endParaRPr lang="en-US" sz="1000" dirty="0"/>
           </a:p>
@@ -3087,7 +2909,7 @@
                 <a:ea typeface="Rubik" pitchFamily="34" charset="-122"/>
                 <a:cs typeface="Rubik" pitchFamily="34" charset="-120"/>
               </a:rPr>
-              <a:t>מודל עסקי.</a:t>
+              <a:t>מי עוד בשוק?</a:t>
             </a:r>
             <a:endParaRPr lang="en-US" sz="3400" dirty="0"/>
           </a:p>
@@ -3126,7 +2948,7 @@
                 <a:ea typeface="Arial" pitchFamily="34" charset="-122"/>
                 <a:cs typeface="Arial" pitchFamily="34" charset="-120"/>
               </a:rPr>
-              <a:t>חינם ללקוחות. בעלי מקצוע משלמים רק כשהם מקבלים כסף.</a:t>
+              <a:t>המתחרים האמיתיים בישראל — ואיפה אנחנו עוקפים אותם.</a:t>
             </a:r>
             <a:endParaRPr lang="en-US" sz="1400" dirty="0"/>
           </a:p>
@@ -3157,1034 +2979,9 @@
           </a:ln>
         </p:spPr>
       </p:sp>
-      <p:sp>
-        <p:nvSpPr>
-          <p:cNvPr id="6" name="Shape 4"/>
-          <p:cNvSpPr/>
-          <p:nvPr/>
-        </p:nvSpPr>
-        <p:spPr>
-          <a:xfrm>
-            <a:off x="5760720" y="1554480"/>
-            <a:ext cx="2926080" cy="2926080"/>
-          </a:xfrm>
-          <a:prstGeom prst="roundRect">
-            <a:avLst>
-              <a:gd name="adj" fmla="val 5625"/>
-            </a:avLst>
-          </a:prstGeom>
-          <a:solidFill>
-            <a:srgbClr val="1A1B4B"/>
-          </a:solidFill>
-          <a:ln w="12700">
-            <a:solidFill>
-              <a:srgbClr val="1A1B4B"/>
-            </a:solidFill>
-            <a:prstDash val="solid"/>
-          </a:ln>
-        </p:spPr>
-      </p:sp>
-      <p:sp>
-        <p:nvSpPr>
-          <p:cNvPr id="7" name="Text 5"/>
-          <p:cNvSpPr/>
-          <p:nvPr/>
-        </p:nvSpPr>
-        <p:spPr>
-          <a:xfrm>
-            <a:off x="5760720" y="1737360"/>
-            <a:ext cx="2926080" cy="1097280"/>
-          </a:xfrm>
-          <a:prstGeom prst="rect">
-            <a:avLst/>
-          </a:prstGeom>
-          <a:noFill/>
-          <a:ln/>
-        </p:spPr>
-        <p:txBody>
-          <a:bodyPr wrap="square" lIns="0" tIns="0" rIns="0" bIns="0" rtlCol="0" anchor="ctr"/>
-          <a:lstStyle/>
-          <a:p>
-            <a:pPr algn="ctr" indent="0" marL="0">
-              <a:buNone/>
-            </a:pPr>
-            <a:r>
-              <a:rPr lang="en-US" sz="8200" b="1" dirty="0">
-                <a:solidFill>
-                  <a:srgbClr val="E5B77A"/>
-                </a:solidFill>
-                <a:latin typeface="Rubik" pitchFamily="34" charset="0"/>
-                <a:ea typeface="Rubik" pitchFamily="34" charset="-122"/>
-                <a:cs typeface="Rubik" pitchFamily="34" charset="-120"/>
-              </a:rPr>
-              <a:t>12%</a:t>
-            </a:r>
-            <a:endParaRPr lang="en-US" sz="8200" dirty="0"/>
-          </a:p>
-        </p:txBody>
-      </p:sp>
-      <p:sp>
-        <p:nvSpPr>
-          <p:cNvPr id="8" name="Text 6"/>
-          <p:cNvSpPr/>
-          <p:nvPr/>
-        </p:nvSpPr>
-        <p:spPr>
-          <a:xfrm>
-            <a:off x="5760720" y="2880360"/>
-            <a:ext cx="2926080" cy="365760"/>
-          </a:xfrm>
-          <a:prstGeom prst="rect">
-            <a:avLst/>
-          </a:prstGeom>
-          <a:noFill/>
-          <a:ln/>
-        </p:spPr>
-        <p:txBody>
-          <a:bodyPr wrap="square" lIns="0" tIns="0" rIns="0" bIns="0" rtlCol="0" anchor="ctr"/>
-          <a:lstStyle/>
-          <a:p>
-            <a:pPr rtl="1" algn="ctr" indent="0" marL="0">
-              <a:buNone/>
-            </a:pPr>
-            <a:r>
-              <a:rPr lang="en-US" sz="1400" b="1" dirty="0">
-                <a:solidFill>
-                  <a:srgbClr val="FBFAF7"/>
-                </a:solidFill>
-                <a:latin typeface="Rubik" pitchFamily="34" charset="0"/>
-                <a:ea typeface="Rubik" pitchFamily="34" charset="-122"/>
-                <a:cs typeface="Rubik" pitchFamily="34" charset="-120"/>
-              </a:rPr>
-              <a:t>עמלה על עבודה שנסגרה</a:t>
-            </a:r>
-            <a:endParaRPr lang="en-US" sz="1400" dirty="0"/>
-          </a:p>
-        </p:txBody>
-      </p:sp>
-      <p:sp>
-        <p:nvSpPr>
-          <p:cNvPr id="9" name="Text 7"/>
-          <p:cNvSpPr/>
-          <p:nvPr/>
-        </p:nvSpPr>
-        <p:spPr>
-          <a:xfrm>
-            <a:off x="5760720" y="3291840"/>
-            <a:ext cx="2926080" cy="1097280"/>
-          </a:xfrm>
-          <a:prstGeom prst="rect">
-            <a:avLst/>
-          </a:prstGeom>
-          <a:noFill/>
-          <a:ln/>
-        </p:spPr>
-        <p:txBody>
-          <a:bodyPr wrap="square" lIns="0" tIns="0" rIns="0" bIns="0" rtlCol="0" anchor="ctr"/>
-          <a:lstStyle/>
-          <a:p>
-            <a:pPr rtl="1" algn="ctr" indent="0" marL="0">
-              <a:buNone/>
-            </a:pPr>
-            <a:r>
-              <a:rPr lang="en-US" sz="1100" i="1" dirty="0">
-                <a:solidFill>
-                  <a:srgbClr val="E8ECFC"/>
-                </a:solidFill>
-                <a:latin typeface="Arial" pitchFamily="34" charset="0"/>
-                <a:ea typeface="Arial" pitchFamily="34" charset="-122"/>
-                <a:cs typeface="Arial" pitchFamily="34" charset="-120"/>
-              </a:rPr>
-              <a:t>משולמת ע"י בעל המקצוע. רק אחרי שהלקוח אישר שהעבודה בוצעה.</a:t>
-            </a:r>
-            <a:endParaRPr lang="en-US" sz="1100" dirty="0"/>
-          </a:p>
-        </p:txBody>
-      </p:sp>
-      <p:sp>
-        <p:nvSpPr>
-          <p:cNvPr id="10" name="Shape 8"/>
-          <p:cNvSpPr/>
-          <p:nvPr/>
-        </p:nvSpPr>
-        <p:spPr>
-          <a:xfrm>
-            <a:off x="457200" y="1554480"/>
-            <a:ext cx="5120640" cy="402336"/>
-          </a:xfrm>
-          <a:prstGeom prst="rect">
-            <a:avLst/>
-          </a:prstGeom>
-          <a:solidFill>
-            <a:srgbClr val="F7F3ED"/>
-          </a:solidFill>
-          <a:ln w="6350">
-            <a:solidFill>
-              <a:srgbClr val="E2E8F0"/>
-            </a:solidFill>
-            <a:prstDash val="solid"/>
-          </a:ln>
-        </p:spPr>
-      </p:sp>
-      <p:sp>
-        <p:nvSpPr>
-          <p:cNvPr id="11" name="Text 9"/>
-          <p:cNvSpPr/>
-          <p:nvPr/>
-        </p:nvSpPr>
-        <p:spPr>
-          <a:xfrm>
-            <a:off x="2560320" y="1554480"/>
-            <a:ext cx="2880360" cy="402336"/>
-          </a:xfrm>
-          <a:prstGeom prst="rect">
-            <a:avLst/>
-          </a:prstGeom>
-          <a:noFill/>
-          <a:ln/>
-        </p:spPr>
-        <p:txBody>
-          <a:bodyPr wrap="square" lIns="0" tIns="0" rIns="0" bIns="0" rtlCol="0" anchor="ctr"/>
-          <a:lstStyle/>
-          <a:p>
-            <a:pPr rtl="1" algn="r" indent="0" marL="0">
-              <a:buNone/>
-            </a:pPr>
-            <a:r>
-              <a:rPr lang="en-US" sz="1200" dirty="0">
-                <a:solidFill>
-                  <a:srgbClr val="0F172A"/>
-                </a:solidFill>
-                <a:latin typeface="Arial" pitchFamily="34" charset="0"/>
-                <a:ea typeface="Arial" pitchFamily="34" charset="-122"/>
-                <a:cs typeface="Arial" pitchFamily="34" charset="-120"/>
-              </a:rPr>
-              <a:t>גודל עבודה ממוצע</a:t>
-            </a:r>
-            <a:endParaRPr lang="en-US" sz="1200" dirty="0"/>
-          </a:p>
-        </p:txBody>
-      </p:sp>
-      <p:sp>
-        <p:nvSpPr>
-          <p:cNvPr id="12" name="Text 10"/>
-          <p:cNvSpPr/>
-          <p:nvPr/>
-        </p:nvSpPr>
-        <p:spPr>
-          <a:xfrm>
-            <a:off x="594360" y="1554480"/>
-            <a:ext cx="1920240" cy="402336"/>
-          </a:xfrm>
-          <a:prstGeom prst="rect">
-            <a:avLst/>
-          </a:prstGeom>
-          <a:noFill/>
-          <a:ln/>
-        </p:spPr>
-        <p:txBody>
-          <a:bodyPr wrap="square" lIns="0" tIns="0" rIns="0" bIns="0" rtlCol="0" anchor="ctr"/>
-          <a:lstStyle/>
-          <a:p>
-            <a:pPr algn="l" indent="0" marL="0">
-              <a:buNone/>
-            </a:pPr>
-            <a:r>
-              <a:rPr lang="en-US" sz="1300" b="1" dirty="0">
-                <a:solidFill>
-                  <a:srgbClr val="1A1B4B"/>
-                </a:solidFill>
-                <a:latin typeface="Rubik" pitchFamily="34" charset="0"/>
-                <a:ea typeface="Rubik" pitchFamily="34" charset="-122"/>
-                <a:cs typeface="Rubik" pitchFamily="34" charset="-120"/>
-              </a:rPr>
-              <a:t>₪420</a:t>
-            </a:r>
-            <a:endParaRPr lang="en-US" sz="1300" dirty="0"/>
-          </a:p>
-        </p:txBody>
-      </p:sp>
-      <p:sp>
-        <p:nvSpPr>
-          <p:cNvPr id="13" name="Shape 11"/>
-          <p:cNvSpPr/>
-          <p:nvPr/>
-        </p:nvSpPr>
-        <p:spPr>
-          <a:xfrm>
-            <a:off x="457200" y="2011680"/>
-            <a:ext cx="5120640" cy="402336"/>
-          </a:xfrm>
-          <a:prstGeom prst="rect">
-            <a:avLst/>
-          </a:prstGeom>
-          <a:solidFill>
-            <a:srgbClr val="FBFAF7"/>
-          </a:solidFill>
-          <a:ln w="6350">
-            <a:solidFill>
-              <a:srgbClr val="E2E8F0"/>
-            </a:solidFill>
-            <a:prstDash val="solid"/>
-          </a:ln>
-        </p:spPr>
-      </p:sp>
-      <p:sp>
-        <p:nvSpPr>
-          <p:cNvPr id="14" name="Text 12"/>
-          <p:cNvSpPr/>
-          <p:nvPr/>
-        </p:nvSpPr>
-        <p:spPr>
-          <a:xfrm>
-            <a:off x="2560320" y="2011680"/>
-            <a:ext cx="2880360" cy="402336"/>
-          </a:xfrm>
-          <a:prstGeom prst="rect">
-            <a:avLst/>
-          </a:prstGeom>
-          <a:noFill/>
-          <a:ln/>
-        </p:spPr>
-        <p:txBody>
-          <a:bodyPr wrap="square" lIns="0" tIns="0" rIns="0" bIns="0" rtlCol="0" anchor="ctr"/>
-          <a:lstStyle/>
-          <a:p>
-            <a:pPr rtl="1" algn="r" indent="0" marL="0">
-              <a:buNone/>
-            </a:pPr>
-            <a:r>
-              <a:rPr lang="en-US" sz="1200" dirty="0">
-                <a:solidFill>
-                  <a:srgbClr val="0F172A"/>
-                </a:solidFill>
-                <a:latin typeface="Arial" pitchFamily="34" charset="0"/>
-                <a:ea typeface="Arial" pitchFamily="34" charset="-122"/>
-                <a:cs typeface="Arial" pitchFamily="34" charset="-120"/>
-              </a:rPr>
-              <a:t>הכנסה לעבודה</a:t>
-            </a:r>
-            <a:endParaRPr lang="en-US" sz="1200" dirty="0"/>
-          </a:p>
-        </p:txBody>
-      </p:sp>
-      <p:sp>
-        <p:nvSpPr>
-          <p:cNvPr id="15" name="Text 13"/>
-          <p:cNvSpPr/>
-          <p:nvPr/>
-        </p:nvSpPr>
-        <p:spPr>
-          <a:xfrm>
-            <a:off x="594360" y="2011680"/>
-            <a:ext cx="1920240" cy="402336"/>
-          </a:xfrm>
-          <a:prstGeom prst="rect">
-            <a:avLst/>
-          </a:prstGeom>
-          <a:noFill/>
-          <a:ln/>
-        </p:spPr>
-        <p:txBody>
-          <a:bodyPr wrap="square" lIns="0" tIns="0" rIns="0" bIns="0" rtlCol="0" anchor="ctr"/>
-          <a:lstStyle/>
-          <a:p>
-            <a:pPr algn="l" indent="0" marL="0">
-              <a:buNone/>
-            </a:pPr>
-            <a:r>
-              <a:rPr lang="en-US" sz="1300" b="1" dirty="0">
-                <a:solidFill>
-                  <a:srgbClr val="1A1B4B"/>
-                </a:solidFill>
-                <a:latin typeface="Rubik" pitchFamily="34" charset="0"/>
-                <a:ea typeface="Rubik" pitchFamily="34" charset="-122"/>
-                <a:cs typeface="Rubik" pitchFamily="34" charset="-120"/>
-              </a:rPr>
-              <a:t>₪50</a:t>
-            </a:r>
-            <a:endParaRPr lang="en-US" sz="1300" dirty="0"/>
-          </a:p>
-        </p:txBody>
-      </p:sp>
-      <p:sp>
-        <p:nvSpPr>
-          <p:cNvPr id="16" name="Shape 14"/>
-          <p:cNvSpPr/>
-          <p:nvPr/>
-        </p:nvSpPr>
-        <p:spPr>
-          <a:xfrm>
-            <a:off x="457200" y="2468880"/>
-            <a:ext cx="5120640" cy="402336"/>
-          </a:xfrm>
-          <a:prstGeom prst="rect">
-            <a:avLst/>
-          </a:prstGeom>
-          <a:solidFill>
-            <a:srgbClr val="F7F3ED"/>
-          </a:solidFill>
-          <a:ln w="6350">
-            <a:solidFill>
-              <a:srgbClr val="E2E8F0"/>
-            </a:solidFill>
-            <a:prstDash val="solid"/>
-          </a:ln>
-        </p:spPr>
-      </p:sp>
-      <p:sp>
-        <p:nvSpPr>
-          <p:cNvPr id="17" name="Text 15"/>
-          <p:cNvSpPr/>
-          <p:nvPr/>
-        </p:nvSpPr>
-        <p:spPr>
-          <a:xfrm>
-            <a:off x="2560320" y="2468880"/>
-            <a:ext cx="2880360" cy="402336"/>
-          </a:xfrm>
-          <a:prstGeom prst="rect">
-            <a:avLst/>
-          </a:prstGeom>
-          <a:noFill/>
-          <a:ln/>
-        </p:spPr>
-        <p:txBody>
-          <a:bodyPr wrap="square" lIns="0" tIns="0" rIns="0" bIns="0" rtlCol="0" anchor="ctr"/>
-          <a:lstStyle/>
-          <a:p>
-            <a:pPr rtl="1" algn="r" indent="0" marL="0">
-              <a:buNone/>
-            </a:pPr>
-            <a:r>
-              <a:rPr lang="en-US" sz="1200" dirty="0">
-                <a:solidFill>
-                  <a:srgbClr val="0F172A"/>
-                </a:solidFill>
-                <a:latin typeface="Arial" pitchFamily="34" charset="0"/>
-                <a:ea typeface="Arial" pitchFamily="34" charset="-122"/>
-                <a:cs typeface="Arial" pitchFamily="34" charset="-120"/>
-              </a:rPr>
-              <a:t>עלות ישירה (AI + WA)</a:t>
-            </a:r>
-            <a:endParaRPr lang="en-US" sz="1200" dirty="0"/>
-          </a:p>
-        </p:txBody>
-      </p:sp>
-      <p:sp>
-        <p:nvSpPr>
-          <p:cNvPr id="18" name="Text 16"/>
-          <p:cNvSpPr/>
-          <p:nvPr/>
-        </p:nvSpPr>
-        <p:spPr>
-          <a:xfrm>
-            <a:off x="594360" y="2468880"/>
-            <a:ext cx="1920240" cy="402336"/>
-          </a:xfrm>
-          <a:prstGeom prst="rect">
-            <a:avLst/>
-          </a:prstGeom>
-          <a:noFill/>
-          <a:ln/>
-        </p:spPr>
-        <p:txBody>
-          <a:bodyPr wrap="square" lIns="0" tIns="0" rIns="0" bIns="0" rtlCol="0" anchor="ctr"/>
-          <a:lstStyle/>
-          <a:p>
-            <a:pPr algn="l" indent="0" marL="0">
-              <a:buNone/>
-            </a:pPr>
-            <a:r>
-              <a:rPr lang="en-US" sz="1300" b="1" dirty="0">
-                <a:solidFill>
-                  <a:srgbClr val="1A1B4B"/>
-                </a:solidFill>
-                <a:latin typeface="Rubik" pitchFamily="34" charset="0"/>
-                <a:ea typeface="Rubik" pitchFamily="34" charset="-122"/>
-                <a:cs typeface="Rubik" pitchFamily="34" charset="-120"/>
-              </a:rPr>
-              <a:t>₪3</a:t>
-            </a:r>
-            <a:endParaRPr lang="en-US" sz="1300" dirty="0"/>
-          </a:p>
-        </p:txBody>
-      </p:sp>
-      <p:sp>
-        <p:nvSpPr>
-          <p:cNvPr id="19" name="Shape 17"/>
-          <p:cNvSpPr/>
-          <p:nvPr/>
-        </p:nvSpPr>
-        <p:spPr>
-          <a:xfrm>
-            <a:off x="457200" y="2926080"/>
-            <a:ext cx="5120640" cy="402336"/>
-          </a:xfrm>
-          <a:prstGeom prst="rect">
-            <a:avLst/>
-          </a:prstGeom>
-          <a:solidFill>
-            <a:srgbClr val="FBFAF7"/>
-          </a:solidFill>
-          <a:ln w="6350">
-            <a:solidFill>
-              <a:srgbClr val="E2E8F0"/>
-            </a:solidFill>
-            <a:prstDash val="solid"/>
-          </a:ln>
-        </p:spPr>
-      </p:sp>
-      <p:sp>
-        <p:nvSpPr>
-          <p:cNvPr id="20" name="Text 18"/>
-          <p:cNvSpPr/>
-          <p:nvPr/>
-        </p:nvSpPr>
-        <p:spPr>
-          <a:xfrm>
-            <a:off x="2560320" y="2926080"/>
-            <a:ext cx="2880360" cy="402336"/>
-          </a:xfrm>
-          <a:prstGeom prst="rect">
-            <a:avLst/>
-          </a:prstGeom>
-          <a:noFill/>
-          <a:ln/>
-        </p:spPr>
-        <p:txBody>
-          <a:bodyPr wrap="square" lIns="0" tIns="0" rIns="0" bIns="0" rtlCol="0" anchor="ctr"/>
-          <a:lstStyle/>
-          <a:p>
-            <a:pPr rtl="1" algn="r" indent="0" marL="0">
-              <a:buNone/>
-            </a:pPr>
-            <a:r>
-              <a:rPr lang="en-US" sz="1200" dirty="0">
-                <a:solidFill>
-                  <a:srgbClr val="0F172A"/>
-                </a:solidFill>
-                <a:latin typeface="Arial" pitchFamily="34" charset="0"/>
-                <a:ea typeface="Arial" pitchFamily="34" charset="-122"/>
-                <a:cs typeface="Arial" pitchFamily="34" charset="-120"/>
-              </a:rPr>
-              <a:t>רווח תרומה</a:t>
-            </a:r>
-            <a:endParaRPr lang="en-US" sz="1200" dirty="0"/>
-          </a:p>
-        </p:txBody>
-      </p:sp>
-      <p:sp>
-        <p:nvSpPr>
-          <p:cNvPr id="21" name="Text 19"/>
-          <p:cNvSpPr/>
-          <p:nvPr/>
-        </p:nvSpPr>
-        <p:spPr>
-          <a:xfrm>
-            <a:off x="594360" y="2926080"/>
-            <a:ext cx="1920240" cy="402336"/>
-          </a:xfrm>
-          <a:prstGeom prst="rect">
-            <a:avLst/>
-          </a:prstGeom>
-          <a:noFill/>
-          <a:ln/>
-        </p:spPr>
-        <p:txBody>
-          <a:bodyPr wrap="square" lIns="0" tIns="0" rIns="0" bIns="0" rtlCol="0" anchor="ctr"/>
-          <a:lstStyle/>
-          <a:p>
-            <a:pPr algn="l" indent="0" marL="0">
-              <a:buNone/>
-            </a:pPr>
-            <a:r>
-              <a:rPr lang="en-US" sz="1300" b="1" dirty="0">
-                <a:solidFill>
-                  <a:srgbClr val="1A1B4B"/>
-                </a:solidFill>
-                <a:latin typeface="Rubik" pitchFamily="34" charset="0"/>
-                <a:ea typeface="Rubik" pitchFamily="34" charset="-122"/>
-                <a:cs typeface="Rubik" pitchFamily="34" charset="-120"/>
-              </a:rPr>
-              <a:t>₪47  (94%)</a:t>
-            </a:r>
-            <a:endParaRPr lang="en-US" sz="1300" dirty="0"/>
-          </a:p>
-        </p:txBody>
-      </p:sp>
-      <p:sp>
-        <p:nvSpPr>
-          <p:cNvPr id="22" name="Shape 20"/>
-          <p:cNvSpPr/>
-          <p:nvPr/>
-        </p:nvSpPr>
-        <p:spPr>
-          <a:xfrm>
-            <a:off x="457200" y="3383280"/>
-            <a:ext cx="5120640" cy="402336"/>
-          </a:xfrm>
-          <a:prstGeom prst="rect">
-            <a:avLst/>
-          </a:prstGeom>
-          <a:solidFill>
-            <a:srgbClr val="F7F3ED"/>
-          </a:solidFill>
-          <a:ln w="6350">
-            <a:solidFill>
-              <a:srgbClr val="E2E8F0"/>
-            </a:solidFill>
-            <a:prstDash val="solid"/>
-          </a:ln>
-        </p:spPr>
-      </p:sp>
-      <p:sp>
-        <p:nvSpPr>
-          <p:cNvPr id="23" name="Text 21"/>
-          <p:cNvSpPr/>
-          <p:nvPr/>
-        </p:nvSpPr>
-        <p:spPr>
-          <a:xfrm>
-            <a:off x="2560320" y="3383280"/>
-            <a:ext cx="2880360" cy="402336"/>
-          </a:xfrm>
-          <a:prstGeom prst="rect">
-            <a:avLst/>
-          </a:prstGeom>
-          <a:noFill/>
-          <a:ln/>
-        </p:spPr>
-        <p:txBody>
-          <a:bodyPr wrap="square" lIns="0" tIns="0" rIns="0" bIns="0" rtlCol="0" anchor="ctr"/>
-          <a:lstStyle/>
-          <a:p>
-            <a:pPr rtl="1" algn="r" indent="0" marL="0">
-              <a:buNone/>
-            </a:pPr>
-            <a:r>
-              <a:rPr lang="en-US" sz="1200" dirty="0">
-                <a:solidFill>
-                  <a:srgbClr val="0F172A"/>
-                </a:solidFill>
-                <a:latin typeface="Arial" pitchFamily="34" charset="0"/>
-                <a:ea typeface="Arial" pitchFamily="34" charset="-122"/>
-                <a:cs typeface="Arial" pitchFamily="34" charset="-120"/>
-              </a:rPr>
-              <a:t>CAC (מוקדם)</a:t>
-            </a:r>
-            <a:endParaRPr lang="en-US" sz="1200" dirty="0"/>
-          </a:p>
-        </p:txBody>
-      </p:sp>
-      <p:sp>
-        <p:nvSpPr>
-          <p:cNvPr id="24" name="Text 22"/>
-          <p:cNvSpPr/>
-          <p:nvPr/>
-        </p:nvSpPr>
-        <p:spPr>
-          <a:xfrm>
-            <a:off x="594360" y="3383280"/>
-            <a:ext cx="1920240" cy="402336"/>
-          </a:xfrm>
-          <a:prstGeom prst="rect">
-            <a:avLst/>
-          </a:prstGeom>
-          <a:noFill/>
-          <a:ln/>
-        </p:spPr>
-        <p:txBody>
-          <a:bodyPr wrap="square" lIns="0" tIns="0" rIns="0" bIns="0" rtlCol="0" anchor="ctr"/>
-          <a:lstStyle/>
-          <a:p>
-            <a:pPr algn="l" indent="0" marL="0">
-              <a:buNone/>
-            </a:pPr>
-            <a:r>
-              <a:rPr lang="en-US" sz="1300" b="1" dirty="0">
-                <a:solidFill>
-                  <a:srgbClr val="1A1B4B"/>
-                </a:solidFill>
-                <a:latin typeface="Rubik" pitchFamily="34" charset="0"/>
-                <a:ea typeface="Rubik" pitchFamily="34" charset="-122"/>
-                <a:cs typeface="Rubik" pitchFamily="34" charset="-120"/>
-              </a:rPr>
-              <a:t>₪18 / קריאה ראשונה</a:t>
-            </a:r>
-            <a:endParaRPr lang="en-US" sz="1300" dirty="0"/>
-          </a:p>
-        </p:txBody>
-      </p:sp>
-      <p:sp>
-        <p:nvSpPr>
-          <p:cNvPr id="25" name="Shape 23"/>
-          <p:cNvSpPr/>
-          <p:nvPr/>
-        </p:nvSpPr>
-        <p:spPr>
-          <a:xfrm>
-            <a:off x="457200" y="3840480"/>
-            <a:ext cx="5120640" cy="402336"/>
-          </a:xfrm>
-          <a:prstGeom prst="rect">
-            <a:avLst/>
-          </a:prstGeom>
-          <a:solidFill>
-            <a:srgbClr val="FBFAF7"/>
-          </a:solidFill>
-          <a:ln w="6350">
-            <a:solidFill>
-              <a:srgbClr val="E2E8F0"/>
-            </a:solidFill>
-            <a:prstDash val="solid"/>
-          </a:ln>
-        </p:spPr>
-      </p:sp>
-      <p:sp>
-        <p:nvSpPr>
-          <p:cNvPr id="26" name="Text 24"/>
-          <p:cNvSpPr/>
-          <p:nvPr/>
-        </p:nvSpPr>
-        <p:spPr>
-          <a:xfrm>
-            <a:off x="2560320" y="3840480"/>
-            <a:ext cx="2880360" cy="402336"/>
-          </a:xfrm>
-          <a:prstGeom prst="rect">
-            <a:avLst/>
-          </a:prstGeom>
-          <a:noFill/>
-          <a:ln/>
-        </p:spPr>
-        <p:txBody>
-          <a:bodyPr wrap="square" lIns="0" tIns="0" rIns="0" bIns="0" rtlCol="0" anchor="ctr"/>
-          <a:lstStyle/>
-          <a:p>
-            <a:pPr rtl="1" algn="r" indent="0" marL="0">
-              <a:buNone/>
-            </a:pPr>
-            <a:r>
-              <a:rPr lang="en-US" sz="1200" dirty="0">
-                <a:solidFill>
-                  <a:srgbClr val="0F172A"/>
-                </a:solidFill>
-                <a:latin typeface="Arial" pitchFamily="34" charset="0"/>
-                <a:ea typeface="Arial" pitchFamily="34" charset="-122"/>
-                <a:cs typeface="Arial" pitchFamily="34" charset="-120"/>
-              </a:rPr>
-              <a:t>החזר השקעה</a:t>
-            </a:r>
-            <a:endParaRPr lang="en-US" sz="1200" dirty="0"/>
-          </a:p>
-        </p:txBody>
-      </p:sp>
-      <p:sp>
-        <p:nvSpPr>
-          <p:cNvPr id="27" name="Text 25"/>
-          <p:cNvSpPr/>
-          <p:nvPr/>
-        </p:nvSpPr>
-        <p:spPr>
-          <a:xfrm>
-            <a:off x="594360" y="3840480"/>
-            <a:ext cx="1920240" cy="402336"/>
-          </a:xfrm>
-          <a:prstGeom prst="rect">
-            <a:avLst/>
-          </a:prstGeom>
-          <a:noFill/>
-          <a:ln/>
-        </p:spPr>
-        <p:txBody>
-          <a:bodyPr wrap="square" lIns="0" tIns="0" rIns="0" bIns="0" rtlCol="0" anchor="ctr"/>
-          <a:lstStyle/>
-          <a:p>
-            <a:pPr algn="l" indent="0" marL="0">
-              <a:buNone/>
-            </a:pPr>
-            <a:r>
-              <a:rPr lang="en-US" sz="1300" b="1" dirty="0">
-                <a:solidFill>
-                  <a:srgbClr val="1A1B4B"/>
-                </a:solidFill>
-                <a:latin typeface="Rubik" pitchFamily="34" charset="0"/>
-                <a:ea typeface="Rubik" pitchFamily="34" charset="-122"/>
-                <a:cs typeface="Rubik" pitchFamily="34" charset="-120"/>
-              </a:rPr>
-              <a:t>עבודה מוצלחת ראשונה</a:t>
-            </a:r>
-            <a:endParaRPr lang="en-US" sz="1300" dirty="0"/>
-          </a:p>
-        </p:txBody>
-      </p:sp>
-      <p:sp>
-        <p:nvSpPr>
-          <p:cNvPr id="28" name="Shape 26"/>
-          <p:cNvSpPr/>
-          <p:nvPr/>
-        </p:nvSpPr>
-        <p:spPr>
-          <a:xfrm>
-            <a:off x="0" y="4869180"/>
-            <a:ext cx="9144000" cy="274320"/>
-          </a:xfrm>
-          <a:prstGeom prst="rect">
-            <a:avLst/>
-          </a:prstGeom>
-          <a:solidFill>
-            <a:srgbClr val="1A1B4B"/>
-          </a:solidFill>
-          <a:ln w="12700">
-            <a:solidFill>
-              <a:srgbClr val="1A1B4B"/>
-            </a:solidFill>
-            <a:prstDash val="solid"/>
-          </a:ln>
-        </p:spPr>
-      </p:sp>
-      <p:sp>
-        <p:nvSpPr>
-          <p:cNvPr id="29" name="Text 27"/>
-          <p:cNvSpPr/>
-          <p:nvPr/>
-        </p:nvSpPr>
-        <p:spPr>
-          <a:xfrm>
-            <a:off x="7315200" y="4869180"/>
-            <a:ext cx="1645920" cy="274320"/>
-          </a:xfrm>
-          <a:prstGeom prst="rect">
-            <a:avLst/>
-          </a:prstGeom>
-          <a:noFill/>
-          <a:ln/>
-        </p:spPr>
-        <p:txBody>
-          <a:bodyPr wrap="square" lIns="0" tIns="0" rIns="0" bIns="0" rtlCol="0" anchor="ctr"/>
-          <a:lstStyle/>
-          <a:p>
-            <a:pPr algn="r" indent="0" marL="0">
-              <a:buNone/>
-            </a:pPr>
-            <a:r>
-              <a:rPr lang="en-US" sz="1000" b="1" dirty="0">
-                <a:solidFill>
-                  <a:srgbClr val="E5B77A"/>
-                </a:solidFill>
-                <a:latin typeface="Rubik" pitchFamily="34" charset="0"/>
-                <a:ea typeface="Rubik" pitchFamily="34" charset="-122"/>
-                <a:cs typeface="Rubik" pitchFamily="34" charset="-120"/>
-              </a:rPr>
-              <a:t>ai-fixly</a:t>
-            </a:r>
-            <a:endParaRPr lang="en-US" sz="1000" dirty="0"/>
-          </a:p>
-        </p:txBody>
-      </p:sp>
-      <p:sp>
-        <p:nvSpPr>
-          <p:cNvPr id="30" name="Text 28"/>
-          <p:cNvSpPr/>
-          <p:nvPr/>
-        </p:nvSpPr>
-        <p:spPr>
-          <a:xfrm>
-            <a:off x="365760" y="4869180"/>
-            <a:ext cx="731520" cy="274320"/>
-          </a:xfrm>
-          <a:prstGeom prst="rect">
-            <a:avLst/>
-          </a:prstGeom>
-          <a:noFill/>
-          <a:ln/>
-        </p:spPr>
-        <p:txBody>
-          <a:bodyPr wrap="square" lIns="0" tIns="0" rIns="0" bIns="0" rtlCol="0" anchor="ctr"/>
-          <a:lstStyle/>
-          <a:p>
-            <a:pPr algn="l" indent="0" marL="0">
-              <a:buNone/>
-            </a:pPr>
-            <a:r>
-              <a:rPr lang="en-US" sz="1000" dirty="0">
-                <a:solidFill>
-                  <a:srgbClr val="E8ECFC"/>
-                </a:solidFill>
-                <a:latin typeface="Arial" pitchFamily="34" charset="0"/>
-                <a:ea typeface="Arial" pitchFamily="34" charset="-122"/>
-                <a:cs typeface="Arial" pitchFamily="34" charset="-120"/>
-              </a:rPr>
-              <a:t>11 / 14</a:t>
-            </a:r>
-            <a:endParaRPr lang="en-US" sz="1000" dirty="0"/>
-          </a:p>
-        </p:txBody>
-      </p:sp>
-    </p:spTree>
-  </p:cSld>
-  <p:clrMapOvr>
-    <a:masterClrMapping/>
-  </p:clrMapOvr>
-</p:sld>
-</file>
-
-<file path=ppt/slides/slide12.xml><?xml version="1.0" encoding="utf-8"?>
-<p:sld xmlns:a="http://schemas.openxmlformats.org/drawingml/2006/main" xmlns:r="http://schemas.openxmlformats.org/officeDocument/2006/relationships" xmlns:p="http://schemas.openxmlformats.org/presentationml/2006/main">
-  <p:cSld name="Slide 12">
-    <p:bg>
-      <p:bgPr>
-        <a:solidFill>
-          <a:srgbClr val="FBFAF7"/>
-        </a:solidFill>
-      </p:bgPr>
-    </p:bg>
-    <p:spTree>
-      <p:nvGrpSpPr>
-        <p:cNvPr id="1" name=""/>
-        <p:cNvGrpSpPr/>
-        <p:nvPr/>
-      </p:nvGrpSpPr>
-      <p:grpSpPr>
-        <a:xfrm>
-          <a:off x="0" y="0"/>
-          <a:ext cx="0" cy="0"/>
-          <a:chOff x="0" y="0"/>
-          <a:chExt cx="0" cy="0"/>
-        </a:xfrm>
-      </p:grpSpPr>
-      <p:sp>
-        <p:nvSpPr>
-          <p:cNvPr id="2" name="Shape 0"/>
-          <p:cNvSpPr/>
-          <p:nvPr/>
-        </p:nvSpPr>
-        <p:spPr>
-          <a:xfrm>
-            <a:off x="0" y="0"/>
-            <a:ext cx="9144000" cy="54864"/>
-          </a:xfrm>
-          <a:prstGeom prst="rect">
-            <a:avLst/>
-          </a:prstGeom>
-          <a:solidFill>
-            <a:srgbClr val="E5B77A"/>
-          </a:solidFill>
-          <a:ln w="12700">
-            <a:solidFill>
-              <a:srgbClr val="E5B77A"/>
-            </a:solidFill>
-            <a:prstDash val="solid"/>
-          </a:ln>
-        </p:spPr>
-      </p:sp>
-      <p:sp>
-        <p:nvSpPr>
-          <p:cNvPr id="3" name="Text 1"/>
-          <p:cNvSpPr/>
-          <p:nvPr/>
-        </p:nvSpPr>
-        <p:spPr>
-          <a:xfrm>
-            <a:off x="457200" y="320040"/>
-            <a:ext cx="8229600" cy="731520"/>
-          </a:xfrm>
-          <a:prstGeom prst="rect">
-            <a:avLst/>
-          </a:prstGeom>
-          <a:noFill/>
-          <a:ln/>
-        </p:spPr>
-        <p:txBody>
-          <a:bodyPr wrap="square" lIns="0" tIns="0" rIns="0" bIns="0" rtlCol="0" anchor="ctr"/>
-          <a:lstStyle/>
-          <a:p>
-            <a:pPr rtl="1" algn="r" indent="0" marL="0">
-              <a:buNone/>
-            </a:pPr>
-            <a:r>
-              <a:rPr lang="en-US" sz="3400" b="1" dirty="0">
-                <a:solidFill>
-                  <a:srgbClr val="1A1B4B"/>
-                </a:solidFill>
-                <a:latin typeface="Rubik" pitchFamily="34" charset="0"/>
-                <a:ea typeface="Rubik" pitchFamily="34" charset="-122"/>
-                <a:cs typeface="Rubik" pitchFamily="34" charset="-120"/>
-              </a:rPr>
-              <a:t>מי עוד בשוק?</a:t>
-            </a:r>
-            <a:endParaRPr lang="en-US" sz="3400" dirty="0"/>
-          </a:p>
-        </p:txBody>
-      </p:sp>
-      <p:sp>
-        <p:nvSpPr>
-          <p:cNvPr id="4" name="Text 2"/>
-          <p:cNvSpPr/>
-          <p:nvPr/>
-        </p:nvSpPr>
-        <p:spPr>
-          <a:xfrm>
-            <a:off x="457200" y="1005840"/>
-            <a:ext cx="8229600" cy="365760"/>
-          </a:xfrm>
-          <a:prstGeom prst="rect">
-            <a:avLst/>
-          </a:prstGeom>
-          <a:noFill/>
-          <a:ln/>
-        </p:spPr>
-        <p:txBody>
-          <a:bodyPr wrap="square" lIns="0" tIns="0" rIns="0" bIns="0" rtlCol="0" anchor="ctr"/>
-          <a:lstStyle/>
-          <a:p>
-            <a:pPr rtl="1" algn="r" indent="0" marL="0">
-              <a:buNone/>
-            </a:pPr>
-            <a:r>
-              <a:rPr lang="en-US" sz="1400" dirty="0">
-                <a:solidFill>
-                  <a:srgbClr val="4A5568"/>
-                </a:solidFill>
-                <a:latin typeface="Arial" pitchFamily="34" charset="0"/>
-                <a:ea typeface="Arial" pitchFamily="34" charset="-122"/>
-                <a:cs typeface="Arial" pitchFamily="34" charset="-120"/>
-              </a:rPr>
-              <a:t>אנחנו מנצחים בצירים שבאמת חשובים.</a:t>
-            </a:r>
-            <a:endParaRPr lang="en-US" sz="1400" dirty="0"/>
-          </a:p>
-        </p:txBody>
-      </p:sp>
-      <p:sp>
-        <p:nvSpPr>
-          <p:cNvPr id="5" name="Shape 3"/>
-          <p:cNvSpPr/>
-          <p:nvPr/>
-        </p:nvSpPr>
-        <p:spPr>
-          <a:xfrm>
-            <a:off x="8046720" y="1463040"/>
-            <a:ext cx="640080" cy="36576"/>
-          </a:xfrm>
-          <a:prstGeom prst="rect">
-            <a:avLst/>
-          </a:prstGeom>
-          <a:solidFill>
-            <a:srgbClr val="E5B77A"/>
-          </a:solidFill>
-          <a:ln w="12700">
-            <a:solidFill>
-              <a:srgbClr val="E5B77A"/>
-            </a:solidFill>
-            <a:prstDash val="solid"/>
-          </a:ln>
-        </p:spPr>
-      </p:sp>
       <p:graphicFrame>
         <p:nvGraphicFramePr>
-          <p:cNvPr id="13" name="Table 0"/>
+          <p:cNvPr id="12" name="Table 0"/>
           <p:cNvGraphicFramePr>
             <a:graphicFrameLocks noGrp="1"/>
           </p:cNvGraphicFramePr>
@@ -4205,13 +3002,13 @@
             <a:tbl>
               <a:tblPr/>
               <a:tblGrid>
-                <a:gridCol w="2011680"/>
-                <a:gridCol w="1554480"/>
-                <a:gridCol w="1554480"/>
-                <a:gridCol w="1554480"/>
-                <a:gridCol w="1554480"/>
+                <a:gridCol w="2194560"/>
+                <a:gridCol w="1508760"/>
+                <a:gridCol w="1508760"/>
+                <a:gridCol w="1508760"/>
+                <a:gridCol w="1508760"/>
               </a:tblGrid>
-              <a:tr h="493776">
+              <a:tr h="429768">
                 <a:tc>
                   <a:txBody>
                     <a:bodyPr/>
@@ -4354,7 +3151,7 @@
                           <a:ea typeface="Rubik" pitchFamily="34" charset="-122"/>
                           <a:cs typeface="Rubik" pitchFamily="34" charset="-120"/>
                         </a:rPr>
-                        <a:t>ZAP</a:t>
+                        <a:t>מדרג</a:t>
                       </a:r>
                       <a:endParaRPr lang="en-US" sz="1100" dirty="0">
                         <a:latin typeface="Rubik" charset="0"/>
@@ -4422,7 +3219,7 @@
                           <a:ea typeface="Rubik" pitchFamily="34" charset="-122"/>
                           <a:cs typeface="Rubik" pitchFamily="34" charset="-120"/>
                         </a:rPr>
-                        <a:t>Fixer</a:t>
+                        <a:t>המקצוענים</a:t>
                       </a:r>
                       <a:endParaRPr lang="en-US" sz="1100" dirty="0">
                         <a:latin typeface="Rubik" charset="0"/>
@@ -4490,7 +3287,7 @@
                           <a:ea typeface="Rubik" pitchFamily="34" charset="-122"/>
                           <a:cs typeface="Rubik" pitchFamily="34" charset="-120"/>
                         </a:rPr>
-                        <a:t>דפי זהב / טלפון</a:t>
+                        <a:t>דפי זהב</a:t>
                       </a:r>
                       <a:endParaRPr lang="en-US" sz="1100" dirty="0">
                         <a:latin typeface="Rubik" charset="0"/>
@@ -4542,7 +3339,7 @@
                   </a:tcPr>
                 </a:tc>
               </a:tr>
-              <a:tr h="493776">
+              <a:tr h="429768">
                 <a:tc>
                   <a:txBody>
                     <a:bodyPr/>
@@ -4552,7 +3349,7 @@
                         <a:buNone/>
                       </a:pPr>
                       <a:r>
-                        <a:rPr lang="en-US" sz="1100" b="1" dirty="0">
+                        <a:rPr lang="en-US" sz="1050" b="1" dirty="0">
                           <a:solidFill>
                             <a:srgbClr val="0F172A"/>
                           </a:solidFill>
@@ -4562,7 +3359,7 @@
                         </a:rPr>
                         <a:t>חיכוך הלקוח</a:t>
                       </a:r>
-                      <a:endParaRPr lang="en-US" sz="1100" dirty="0">
+                      <a:endParaRPr lang="en-US" sz="1050" dirty="0">
                         <a:latin typeface="Rubik" charset="0"/>
                         <a:ea typeface="Rubik" charset="0"/>
                         <a:cs typeface="Rubik" charset="0"/>
@@ -4620,7 +3417,7 @@
                         <a:buNone/>
                       </a:pPr>
                       <a:r>
-                        <a:rPr lang="en-US" sz="1100" b="1" dirty="0">
+                        <a:rPr lang="en-US" sz="1050" b="1" dirty="0">
                           <a:solidFill>
                             <a:srgbClr val="F97066"/>
                           </a:solidFill>
@@ -4630,7 +3427,7 @@
                         </a:rPr>
                         <a:t>לחיצה אחת</a:t>
                       </a:r>
-                      <a:endParaRPr lang="en-US" sz="1100" dirty="0">
+                      <a:endParaRPr lang="en-US" sz="1050" dirty="0">
                         <a:latin typeface="Arial" charset="0"/>
                         <a:ea typeface="Arial" charset="0"/>
                         <a:cs typeface="Arial" charset="0"/>
@@ -4688,7 +3485,7 @@
                         <a:buNone/>
                       </a:pPr>
                       <a:r>
-                        <a:rPr lang="en-US" sz="1100" dirty="0">
+                        <a:rPr lang="en-US" sz="1050" dirty="0">
                           <a:solidFill>
                             <a:srgbClr val="0F172A"/>
                           </a:solidFill>
@@ -4698,7 +3495,7 @@
                         </a:rPr>
                         <a:t>טופס + שיחות</a:t>
                       </a:r>
-                      <a:endParaRPr lang="en-US" sz="1100" dirty="0">
+                      <a:endParaRPr lang="en-US" sz="1050" dirty="0">
                         <a:latin typeface="Arial" charset="0"/>
                         <a:ea typeface="Arial" charset="0"/>
                         <a:cs typeface="Arial" charset="0"/>
@@ -4756,7 +3553,7 @@
                         <a:buNone/>
                       </a:pPr>
                       <a:r>
-                        <a:rPr lang="en-US" sz="1100" dirty="0">
+                        <a:rPr lang="en-US" sz="1050" dirty="0">
                           <a:solidFill>
                             <a:srgbClr val="0F172A"/>
                           </a:solidFill>
@@ -4764,9 +3561,9 @@
                           <a:ea typeface="Arial" pitchFamily="34" charset="-122"/>
                           <a:cs typeface="Arial" pitchFamily="34" charset="-120"/>
                         </a:rPr>
-                        <a:t>טופס</a:t>
+                        <a:t>טופס + שיחות</a:t>
                       </a:r>
-                      <a:endParaRPr lang="en-US" sz="1100" dirty="0">
+                      <a:endParaRPr lang="en-US" sz="1050" dirty="0">
                         <a:latin typeface="Arial" charset="0"/>
                         <a:ea typeface="Arial" charset="0"/>
                         <a:cs typeface="Arial" charset="0"/>
@@ -4824,7 +3621,7 @@
                         <a:buNone/>
                       </a:pPr>
                       <a:r>
-                        <a:rPr lang="en-US" sz="1100" dirty="0">
+                        <a:rPr lang="en-US" sz="1050" dirty="0">
                           <a:solidFill>
                             <a:srgbClr val="0F172A"/>
                           </a:solidFill>
@@ -4834,7 +3631,7 @@
                         </a:rPr>
                         <a:t>רולטת טלפון</a:t>
                       </a:r>
-                      <a:endParaRPr lang="en-US" sz="1100" dirty="0">
+                      <a:endParaRPr lang="en-US" sz="1050" dirty="0">
                         <a:latin typeface="Arial" charset="0"/>
                         <a:ea typeface="Arial" charset="0"/>
                         <a:cs typeface="Arial" charset="0"/>
@@ -4884,7 +3681,7 @@
                   </a:tcPr>
                 </a:tc>
               </a:tr>
-              <a:tr h="493776">
+              <a:tr h="429768">
                 <a:tc>
                   <a:txBody>
                     <a:bodyPr/>
@@ -4894,7 +3691,7 @@
                         <a:buNone/>
                       </a:pPr>
                       <a:r>
-                        <a:rPr lang="en-US" sz="1100" b="1" dirty="0">
+                        <a:rPr lang="en-US" sz="1050" b="1" dirty="0">
                           <a:solidFill>
                             <a:srgbClr val="0F172A"/>
                           </a:solidFill>
@@ -4904,7 +3701,7 @@
                         </a:rPr>
                         <a:t>Onboarding לבעל מקצוע</a:t>
                       </a:r>
-                      <a:endParaRPr lang="en-US" sz="1100" dirty="0">
+                      <a:endParaRPr lang="en-US" sz="1050" dirty="0">
                         <a:latin typeface="Rubik" charset="0"/>
                         <a:ea typeface="Rubik" charset="0"/>
                         <a:cs typeface="Rubik" charset="0"/>
@@ -4962,7 +3759,7 @@
                         <a:buNone/>
                       </a:pPr>
                       <a:r>
-                        <a:rPr lang="en-US" sz="1100" b="1" dirty="0">
+                        <a:rPr lang="en-US" sz="1050" b="1" dirty="0">
                           <a:solidFill>
                             <a:srgbClr val="F97066"/>
                           </a:solidFill>
@@ -4972,7 +3769,7 @@
                         </a:rPr>
                         <a:t>שום דבר</a:t>
                       </a:r>
-                      <a:endParaRPr lang="en-US" sz="1100" dirty="0">
+                      <a:endParaRPr lang="en-US" sz="1050" dirty="0">
                         <a:latin typeface="Arial" charset="0"/>
                         <a:ea typeface="Arial" charset="0"/>
                         <a:cs typeface="Arial" charset="0"/>
@@ -5030,7 +3827,7 @@
                         <a:buNone/>
                       </a:pPr>
                       <a:r>
-                        <a:rPr lang="en-US" sz="1100" dirty="0">
+                        <a:rPr lang="en-US" sz="1050" dirty="0">
                           <a:solidFill>
                             <a:srgbClr val="0F172A"/>
                           </a:solidFill>
@@ -5038,9 +3835,9 @@
                           <a:ea typeface="Arial" pitchFamily="34" charset="-122"/>
                           <a:cs typeface="Arial" pitchFamily="34" charset="-120"/>
                         </a:rPr>
-                        <a:t>הרשמה לדשבורד</a:t>
+                        <a:t>הרשמה + אימות</a:t>
                       </a:r>
-                      <a:endParaRPr lang="en-US" sz="1100" dirty="0">
+                      <a:endParaRPr lang="en-US" sz="1050" dirty="0">
                         <a:latin typeface="Arial" charset="0"/>
                         <a:ea typeface="Arial" charset="0"/>
                         <a:cs typeface="Arial" charset="0"/>
@@ -5098,7 +3895,7 @@
                         <a:buNone/>
                       </a:pPr>
                       <a:r>
-                        <a:rPr lang="en-US" sz="1100" dirty="0">
+                        <a:rPr lang="en-US" sz="1050" dirty="0">
                           <a:solidFill>
                             <a:srgbClr val="0F172A"/>
                           </a:solidFill>
@@ -5106,9 +3903,9 @@
                           <a:ea typeface="Arial" pitchFamily="34" charset="-122"/>
                           <a:cs typeface="Arial" pitchFamily="34" charset="-120"/>
                         </a:rPr>
-                        <a:t>התקנת אפליקציה</a:t>
+                        <a:t>פרופיל באתר</a:t>
                       </a:r>
-                      <a:endParaRPr lang="en-US" sz="1100" dirty="0">
+                      <a:endParaRPr lang="en-US" sz="1050" dirty="0">
                         <a:latin typeface="Arial" charset="0"/>
                         <a:ea typeface="Arial" charset="0"/>
                         <a:cs typeface="Arial" charset="0"/>
@@ -5166,7 +3963,7 @@
                         <a:buNone/>
                       </a:pPr>
                       <a:r>
-                        <a:rPr lang="en-US" sz="1100" dirty="0">
+                        <a:rPr lang="en-US" sz="1050" dirty="0">
                           <a:solidFill>
                             <a:srgbClr val="0F172A"/>
                           </a:solidFill>
@@ -5174,9 +3971,9 @@
                           <a:ea typeface="Arial" pitchFamily="34" charset="-122"/>
                           <a:cs typeface="Arial" pitchFamily="34" charset="-120"/>
                         </a:rPr>
-                        <a:t>שום דבר (אורגני)</a:t>
+                        <a:t>מודעה בתשלום</a:t>
                       </a:r>
-                      <a:endParaRPr lang="en-US" sz="1100" dirty="0">
+                      <a:endParaRPr lang="en-US" sz="1050" dirty="0">
                         <a:latin typeface="Arial" charset="0"/>
                         <a:ea typeface="Arial" charset="0"/>
                         <a:cs typeface="Arial" charset="0"/>
@@ -5226,7 +4023,7 @@
                   </a:tcPr>
                 </a:tc>
               </a:tr>
-              <a:tr h="493776">
+              <a:tr h="429768">
                 <a:tc>
                   <a:txBody>
                     <a:bodyPr/>
@@ -5236,7 +4033,7 @@
                         <a:buNone/>
                       </a:pPr>
                       <a:r>
-                        <a:rPr lang="en-US" sz="1100" b="1" dirty="0">
+                        <a:rPr lang="en-US" sz="1050" b="1" dirty="0">
                           <a:solidFill>
                             <a:srgbClr val="0F172A"/>
                           </a:solidFill>
@@ -5246,7 +4043,7 @@
                         </a:rPr>
                         <a:t>סיווג AI</a:t>
                       </a:r>
-                      <a:endParaRPr lang="en-US" sz="1100" dirty="0">
+                      <a:endParaRPr lang="en-US" sz="1050" dirty="0">
                         <a:latin typeface="Rubik" charset="0"/>
                         <a:ea typeface="Rubik" charset="0"/>
                         <a:cs typeface="Rubik" charset="0"/>
@@ -5304,7 +4101,7 @@
                         <a:buNone/>
                       </a:pPr>
                       <a:r>
-                        <a:rPr lang="en-US" sz="1100" b="1" dirty="0">
+                        <a:rPr lang="en-US" sz="1050" b="1" dirty="0">
                           <a:solidFill>
                             <a:srgbClr val="F97066"/>
                           </a:solidFill>
@@ -5314,7 +4111,7 @@
                         </a:rPr>
                         <a:t>כן</a:t>
                       </a:r>
-                      <a:endParaRPr lang="en-US" sz="1100" dirty="0">
+                      <a:endParaRPr lang="en-US" sz="1050" dirty="0">
                         <a:latin typeface="Arial" charset="0"/>
                         <a:ea typeface="Arial" charset="0"/>
                         <a:cs typeface="Arial" charset="0"/>
@@ -5372,7 +4169,7 @@
                         <a:buNone/>
                       </a:pPr>
                       <a:r>
-                        <a:rPr lang="en-US" sz="1100" dirty="0">
+                        <a:rPr lang="en-US" sz="1050" dirty="0">
                           <a:solidFill>
                             <a:srgbClr val="0F172A"/>
                           </a:solidFill>
@@ -5382,7 +4179,7 @@
                         </a:rPr>
                         <a:t>לא</a:t>
                       </a:r>
-                      <a:endParaRPr lang="en-US" sz="1100" dirty="0">
+                      <a:endParaRPr lang="en-US" sz="1050" dirty="0">
                         <a:latin typeface="Arial" charset="0"/>
                         <a:ea typeface="Arial" charset="0"/>
                         <a:cs typeface="Arial" charset="0"/>
@@ -5440,7 +4237,7 @@
                         <a:buNone/>
                       </a:pPr>
                       <a:r>
-                        <a:rPr lang="en-US" sz="1100" dirty="0">
+                        <a:rPr lang="en-US" sz="1050" dirty="0">
                           <a:solidFill>
                             <a:srgbClr val="0F172A"/>
                           </a:solidFill>
@@ -5448,9 +4245,9 @@
                           <a:ea typeface="Arial" pitchFamily="34" charset="-122"/>
                           <a:cs typeface="Arial" pitchFamily="34" charset="-120"/>
                         </a:rPr>
-                        <a:t>חלקי</a:t>
+                        <a:t>לא</a:t>
                       </a:r>
-                      <a:endParaRPr lang="en-US" sz="1100" dirty="0">
+                      <a:endParaRPr lang="en-US" sz="1050" dirty="0">
                         <a:latin typeface="Arial" charset="0"/>
                         <a:ea typeface="Arial" charset="0"/>
                         <a:cs typeface="Arial" charset="0"/>
@@ -5508,7 +4305,7 @@
                         <a:buNone/>
                       </a:pPr>
                       <a:r>
-                        <a:rPr lang="en-US" sz="1100" dirty="0">
+                        <a:rPr lang="en-US" sz="1050" dirty="0">
                           <a:solidFill>
                             <a:srgbClr val="0F172A"/>
                           </a:solidFill>
@@ -5518,7 +4315,7 @@
                         </a:rPr>
                         <a:t>לא</a:t>
                       </a:r>
-                      <a:endParaRPr lang="en-US" sz="1100" dirty="0">
+                      <a:endParaRPr lang="en-US" sz="1050" dirty="0">
                         <a:latin typeface="Arial" charset="0"/>
                         <a:ea typeface="Arial" charset="0"/>
                         <a:cs typeface="Arial" charset="0"/>
@@ -5568,7 +4365,7 @@
                   </a:tcPr>
                 </a:tc>
               </a:tr>
-              <a:tr h="493776">
+              <a:tr h="429768">
                 <a:tc>
                   <a:txBody>
                     <a:bodyPr/>
@@ -5578,7 +4375,7 @@
                         <a:buNone/>
                       </a:pPr>
                       <a:r>
-                        <a:rPr lang="en-US" sz="1100" b="1" dirty="0">
+                        <a:rPr lang="en-US" sz="1050" b="1" dirty="0">
                           <a:solidFill>
                             <a:srgbClr val="0F172A"/>
                           </a:solidFill>
@@ -5588,7 +4385,7 @@
                         </a:rPr>
                         <a:t>הצעות אנונימיות</a:t>
                       </a:r>
-                      <a:endParaRPr lang="en-US" sz="1100" dirty="0">
+                      <a:endParaRPr lang="en-US" sz="1050" dirty="0">
                         <a:latin typeface="Rubik" charset="0"/>
                         <a:ea typeface="Rubik" charset="0"/>
                         <a:cs typeface="Rubik" charset="0"/>
@@ -5646,7 +4443,7 @@
                         <a:buNone/>
                       </a:pPr>
                       <a:r>
-                        <a:rPr lang="en-US" sz="1100" b="1" dirty="0">
+                        <a:rPr lang="en-US" sz="1050" b="1" dirty="0">
                           <a:solidFill>
                             <a:srgbClr val="F97066"/>
                           </a:solidFill>
@@ -5656,7 +4453,7 @@
                         </a:rPr>
                         <a:t>כן</a:t>
                       </a:r>
-                      <a:endParaRPr lang="en-US" sz="1100" dirty="0">
+                      <a:endParaRPr lang="en-US" sz="1050" dirty="0">
                         <a:latin typeface="Arial" charset="0"/>
                         <a:ea typeface="Arial" charset="0"/>
                         <a:cs typeface="Arial" charset="0"/>
@@ -5714,7 +4511,7 @@
                         <a:buNone/>
                       </a:pPr>
                       <a:r>
-                        <a:rPr lang="en-US" sz="1100" dirty="0">
+                        <a:rPr lang="en-US" sz="1050" dirty="0">
                           <a:solidFill>
                             <a:srgbClr val="0F172A"/>
                           </a:solidFill>
@@ -5722,9 +4519,9 @@
                           <a:ea typeface="Arial" pitchFamily="34" charset="-122"/>
                           <a:cs typeface="Arial" pitchFamily="34" charset="-120"/>
                         </a:rPr>
-                        <a:t>לא</a:t>
+                        <a:t>לא — שם מיד</a:t>
                       </a:r>
-                      <a:endParaRPr lang="en-US" sz="1100" dirty="0">
+                      <a:endParaRPr lang="en-US" sz="1050" dirty="0">
                         <a:latin typeface="Arial" charset="0"/>
                         <a:ea typeface="Arial" charset="0"/>
                         <a:cs typeface="Arial" charset="0"/>
@@ -5782,7 +4579,7 @@
                         <a:buNone/>
                       </a:pPr>
                       <a:r>
-                        <a:rPr lang="en-US" sz="1100" dirty="0">
+                        <a:rPr lang="en-US" sz="1050" dirty="0">
                           <a:solidFill>
                             <a:srgbClr val="0F172A"/>
                           </a:solidFill>
@@ -5790,9 +4587,9 @@
                           <a:ea typeface="Arial" pitchFamily="34" charset="-122"/>
                           <a:cs typeface="Arial" pitchFamily="34" charset="-120"/>
                         </a:rPr>
-                        <a:t>לא</a:t>
+                        <a:t>לא — שם מיד</a:t>
                       </a:r>
-                      <a:endParaRPr lang="en-US" sz="1100" dirty="0">
+                      <a:endParaRPr lang="en-US" sz="1050" dirty="0">
                         <a:latin typeface="Arial" charset="0"/>
                         <a:ea typeface="Arial" charset="0"/>
                         <a:cs typeface="Arial" charset="0"/>
@@ -5850,7 +4647,7 @@
                         <a:buNone/>
                       </a:pPr>
                       <a:r>
-                        <a:rPr lang="en-US" sz="1100" dirty="0">
+                        <a:rPr lang="en-US" sz="1050" dirty="0">
                           <a:solidFill>
                             <a:srgbClr val="0F172A"/>
                           </a:solidFill>
@@ -5860,7 +4657,7 @@
                         </a:rPr>
                         <a:t>לא</a:t>
                       </a:r>
-                      <a:endParaRPr lang="en-US" sz="1100" dirty="0">
+                      <a:endParaRPr lang="en-US" sz="1050" dirty="0">
                         <a:latin typeface="Arial" charset="0"/>
                         <a:ea typeface="Arial" charset="0"/>
                         <a:cs typeface="Arial" charset="0"/>
@@ -5910,7 +4707,7 @@
                   </a:tcPr>
                 </a:tc>
               </a:tr>
-              <a:tr h="493776">
+              <a:tr h="429768">
                 <a:tc>
                   <a:txBody>
                     <a:bodyPr/>
@@ -5920,7 +4717,7 @@
                         <a:buNone/>
                       </a:pPr>
                       <a:r>
-                        <a:rPr lang="en-US" sz="1100" b="1" dirty="0">
+                        <a:rPr lang="en-US" sz="1050" b="1" dirty="0">
                           <a:solidFill>
                             <a:srgbClr val="0F172A"/>
                           </a:solidFill>
@@ -5930,7 +4727,7 @@
                         </a:rPr>
                         <a:t>זמן להצעה ראשונה</a:t>
                       </a:r>
-                      <a:endParaRPr lang="en-US" sz="1100" dirty="0">
+                      <a:endParaRPr lang="en-US" sz="1050" dirty="0">
                         <a:latin typeface="Rubik" charset="0"/>
                         <a:ea typeface="Rubik" charset="0"/>
                         <a:cs typeface="Rubik" charset="0"/>
@@ -5988,7 +4785,7 @@
                         <a:buNone/>
                       </a:pPr>
                       <a:r>
-                        <a:rPr lang="en-US" sz="1100" b="1" dirty="0">
+                        <a:rPr lang="en-US" sz="1050" b="1" dirty="0">
                           <a:solidFill>
                             <a:srgbClr val="F97066"/>
                           </a:solidFill>
@@ -5998,7 +4795,7 @@
                         </a:rPr>
                         <a:t>פחות מ-5 דק׳</a:t>
                       </a:r>
-                      <a:endParaRPr lang="en-US" sz="1100" dirty="0">
+                      <a:endParaRPr lang="en-US" sz="1050" dirty="0">
                         <a:latin typeface="Arial" charset="0"/>
                         <a:ea typeface="Arial" charset="0"/>
                         <a:cs typeface="Arial" charset="0"/>
@@ -6056,7 +4853,7 @@
                         <a:buNone/>
                       </a:pPr>
                       <a:r>
-                        <a:rPr lang="en-US" sz="1100" dirty="0">
+                        <a:rPr lang="en-US" sz="1050" dirty="0">
                           <a:solidFill>
                             <a:srgbClr val="0F172A"/>
                           </a:solidFill>
@@ -6066,7 +4863,7 @@
                         </a:rPr>
                         <a:t>שעות</a:t>
                       </a:r>
-                      <a:endParaRPr lang="en-US" sz="1100" dirty="0">
+                      <a:endParaRPr lang="en-US" sz="1050" dirty="0">
                         <a:latin typeface="Arial" charset="0"/>
                         <a:ea typeface="Arial" charset="0"/>
                         <a:cs typeface="Arial" charset="0"/>
@@ -6124,7 +4921,7 @@
                         <a:buNone/>
                       </a:pPr>
                       <a:r>
-                        <a:rPr lang="en-US" sz="1100" dirty="0">
+                        <a:rPr lang="en-US" sz="1050" dirty="0">
                           <a:solidFill>
                             <a:srgbClr val="0F172A"/>
                           </a:solidFill>
@@ -6132,9 +4929,9 @@
                           <a:ea typeface="Arial" pitchFamily="34" charset="-122"/>
                           <a:cs typeface="Arial" pitchFamily="34" charset="-120"/>
                         </a:rPr>
-                        <a:t>30–60 דק׳</a:t>
+                        <a:t>שעות</a:t>
                       </a:r>
-                      <a:endParaRPr lang="en-US" sz="1100" dirty="0">
+                      <a:endParaRPr lang="en-US" sz="1050" dirty="0">
                         <a:latin typeface="Arial" charset="0"/>
                         <a:ea typeface="Arial" charset="0"/>
                         <a:cs typeface="Arial" charset="0"/>
@@ -6192,7 +4989,7 @@
                         <a:buNone/>
                       </a:pPr>
                       <a:r>
-                        <a:rPr lang="en-US" sz="1100" dirty="0">
+                        <a:rPr lang="en-US" sz="1050" dirty="0">
                           <a:solidFill>
                             <a:srgbClr val="0F172A"/>
                           </a:solidFill>
@@ -6202,7 +4999,7 @@
                         </a:rPr>
                         <a:t>שעות/ימים</a:t>
                       </a:r>
-                      <a:endParaRPr lang="en-US" sz="1100" dirty="0">
+                      <a:endParaRPr lang="en-US" sz="1050" dirty="0">
                         <a:latin typeface="Arial" charset="0"/>
                         <a:ea typeface="Arial" charset="0"/>
                         <a:cs typeface="Arial" charset="0"/>
@@ -6252,6 +5049,348 @@
                   </a:tcPr>
                 </a:tc>
               </a:tr>
+              <a:tr h="429768">
+                <a:tc>
+                  <a:txBody>
+                    <a:bodyPr/>
+                    <a:lstStyle/>
+                    <a:p>
+                      <a:pPr rtl="1" algn="r" indent="0" marL="0">
+                        <a:buNone/>
+                      </a:pPr>
+                      <a:r>
+                        <a:rPr lang="en-US" sz="1050" b="1" dirty="0">
+                          <a:solidFill>
+                            <a:srgbClr val="0F172A"/>
+                          </a:solidFill>
+                          <a:latin typeface="Rubik" pitchFamily="34" charset="0"/>
+                          <a:ea typeface="Rubik" pitchFamily="34" charset="-122"/>
+                          <a:cs typeface="Rubik" pitchFamily="34" charset="-120"/>
+                        </a:rPr>
+                        <a:t>המתווך בשיחה</a:t>
+                      </a:r>
+                      <a:endParaRPr lang="en-US" sz="1050" dirty="0">
+                        <a:latin typeface="Rubik" charset="0"/>
+                        <a:ea typeface="Rubik" charset="0"/>
+                        <a:cs typeface="Rubik" charset="0"/>
+                      </a:endParaRPr>
+                    </a:p>
+                  </a:txBody>
+                  <a:tcPr marL="91440" marR="91440" marT="45720" marB="45720" anchor="ctr">
+                    <a:lnL w="6350" cap="flat" cmpd="sng" algn="ctr">
+                      <a:solidFill>
+                        <a:srgbClr val="E2E8F0"/>
+                      </a:solidFill>
+                      <a:prstDash val="solid"/>
+                      <a:round/>
+                      <a:headEnd type="none" w="med" len="med"/>
+                      <a:tailEnd type="none" w="med" len="med"/>
+                    </a:lnL>
+                    <a:lnR w="6350" cap="flat" cmpd="sng" algn="ctr">
+                      <a:solidFill>
+                        <a:srgbClr val="E2E8F0"/>
+                      </a:solidFill>
+                      <a:prstDash val="solid"/>
+                      <a:round/>
+                      <a:headEnd type="none" w="med" len="med"/>
+                      <a:tailEnd type="none" w="med" len="med"/>
+                    </a:lnR>
+                    <a:lnT w="6350" cap="flat" cmpd="sng" algn="ctr">
+                      <a:solidFill>
+                        <a:srgbClr val="E2E8F0"/>
+                      </a:solidFill>
+                      <a:prstDash val="solid"/>
+                      <a:round/>
+                      <a:headEnd type="none" w="med" len="med"/>
+                      <a:tailEnd type="none" w="med" len="med"/>
+                    </a:lnT>
+                    <a:lnB w="6350" cap="flat" cmpd="sng" algn="ctr">
+                      <a:solidFill>
+                        <a:srgbClr val="E2E8F0"/>
+                      </a:solidFill>
+                      <a:prstDash val="solid"/>
+                      <a:round/>
+                      <a:headEnd type="none" w="med" len="med"/>
+                      <a:tailEnd type="none" w="med" len="med"/>
+                    </a:lnB>
+                    <a:solidFill>
+                      <a:srgbClr val="FBFAF7"/>
+                    </a:solidFill>
+                  </a:tcPr>
+                </a:tc>
+                <a:tc>
+                  <a:txBody>
+                    <a:bodyPr/>
+                    <a:lstStyle/>
+                    <a:p>
+                      <a:pPr rtl="1" algn="ctr" indent="0" marL="0">
+                        <a:buNone/>
+                      </a:pPr>
+                      <a:r>
+                        <a:rPr lang="en-US" sz="1050" b="1" dirty="0">
+                          <a:solidFill>
+                            <a:srgbClr val="F97066"/>
+                          </a:solidFill>
+                          <a:latin typeface="Arial" pitchFamily="34" charset="0"/>
+                          <a:ea typeface="Arial" pitchFamily="34" charset="-122"/>
+                          <a:cs typeface="Arial" pitchFamily="34" charset="-120"/>
+                        </a:rPr>
+                        <a:t>אנחנו (AI)</a:t>
+                      </a:r>
+                      <a:endParaRPr lang="en-US" sz="1050" dirty="0">
+                        <a:latin typeface="Arial" charset="0"/>
+                        <a:ea typeface="Arial" charset="0"/>
+                        <a:cs typeface="Arial" charset="0"/>
+                      </a:endParaRPr>
+                    </a:p>
+                  </a:txBody>
+                  <a:tcPr marL="91440" marR="91440" marT="45720" marB="45720" anchor="ctr">
+                    <a:lnL w="6350" cap="flat" cmpd="sng" algn="ctr">
+                      <a:solidFill>
+                        <a:srgbClr val="E2E8F0"/>
+                      </a:solidFill>
+                      <a:prstDash val="solid"/>
+                      <a:round/>
+                      <a:headEnd type="none" w="med" len="med"/>
+                      <a:tailEnd type="none" w="med" len="med"/>
+                    </a:lnL>
+                    <a:lnR w="6350" cap="flat" cmpd="sng" algn="ctr">
+                      <a:solidFill>
+                        <a:srgbClr val="E2E8F0"/>
+                      </a:solidFill>
+                      <a:prstDash val="solid"/>
+                      <a:round/>
+                      <a:headEnd type="none" w="med" len="med"/>
+                      <a:tailEnd type="none" w="med" len="med"/>
+                    </a:lnR>
+                    <a:lnT w="6350" cap="flat" cmpd="sng" algn="ctr">
+                      <a:solidFill>
+                        <a:srgbClr val="E2E8F0"/>
+                      </a:solidFill>
+                      <a:prstDash val="solid"/>
+                      <a:round/>
+                      <a:headEnd type="none" w="med" len="med"/>
+                      <a:tailEnd type="none" w="med" len="med"/>
+                    </a:lnT>
+                    <a:lnB w="6350" cap="flat" cmpd="sng" algn="ctr">
+                      <a:solidFill>
+                        <a:srgbClr val="E2E8F0"/>
+                      </a:solidFill>
+                      <a:prstDash val="solid"/>
+                      <a:round/>
+                      <a:headEnd type="none" w="med" len="med"/>
+                      <a:tailEnd type="none" w="med" len="med"/>
+                    </a:lnB>
+                    <a:solidFill>
+                      <a:srgbClr val="FBFAF7"/>
+                    </a:solidFill>
+                  </a:tcPr>
+                </a:tc>
+                <a:tc>
+                  <a:txBody>
+                    <a:bodyPr/>
+                    <a:lstStyle/>
+                    <a:p>
+                      <a:pPr rtl="1" algn="ctr" indent="0" marL="0">
+                        <a:buNone/>
+                      </a:pPr>
+                      <a:r>
+                        <a:rPr lang="en-US" sz="1050" dirty="0">
+                          <a:solidFill>
+                            <a:srgbClr val="0F172A"/>
+                          </a:solidFill>
+                          <a:latin typeface="Arial" pitchFamily="34" charset="0"/>
+                          <a:ea typeface="Arial" pitchFamily="34" charset="-122"/>
+                          <a:cs typeface="Arial" pitchFamily="34" charset="-120"/>
+                        </a:rPr>
+                        <a:t>הלקוח לבד</a:t>
+                      </a:r>
+                      <a:endParaRPr lang="en-US" sz="1050" dirty="0">
+                        <a:latin typeface="Arial" charset="0"/>
+                        <a:ea typeface="Arial" charset="0"/>
+                        <a:cs typeface="Arial" charset="0"/>
+                      </a:endParaRPr>
+                    </a:p>
+                  </a:txBody>
+                  <a:tcPr marL="91440" marR="91440" marT="45720" marB="45720" anchor="ctr">
+                    <a:lnL w="6350" cap="flat" cmpd="sng" algn="ctr">
+                      <a:solidFill>
+                        <a:srgbClr val="E2E8F0"/>
+                      </a:solidFill>
+                      <a:prstDash val="solid"/>
+                      <a:round/>
+                      <a:headEnd type="none" w="med" len="med"/>
+                      <a:tailEnd type="none" w="med" len="med"/>
+                    </a:lnL>
+                    <a:lnR w="6350" cap="flat" cmpd="sng" algn="ctr">
+                      <a:solidFill>
+                        <a:srgbClr val="E2E8F0"/>
+                      </a:solidFill>
+                      <a:prstDash val="solid"/>
+                      <a:round/>
+                      <a:headEnd type="none" w="med" len="med"/>
+                      <a:tailEnd type="none" w="med" len="med"/>
+                    </a:lnR>
+                    <a:lnT w="6350" cap="flat" cmpd="sng" algn="ctr">
+                      <a:solidFill>
+                        <a:srgbClr val="E2E8F0"/>
+                      </a:solidFill>
+                      <a:prstDash val="solid"/>
+                      <a:round/>
+                      <a:headEnd type="none" w="med" len="med"/>
+                      <a:tailEnd type="none" w="med" len="med"/>
+                    </a:lnT>
+                    <a:lnB w="6350" cap="flat" cmpd="sng" algn="ctr">
+                      <a:solidFill>
+                        <a:srgbClr val="E2E8F0"/>
+                      </a:solidFill>
+                      <a:prstDash val="solid"/>
+                      <a:round/>
+                      <a:headEnd type="none" w="med" len="med"/>
+                      <a:tailEnd type="none" w="med" len="med"/>
+                    </a:lnB>
+                    <a:solidFill>
+                      <a:srgbClr val="FBFAF7"/>
+                    </a:solidFill>
+                  </a:tcPr>
+                </a:tc>
+                <a:tc>
+                  <a:txBody>
+                    <a:bodyPr/>
+                    <a:lstStyle/>
+                    <a:p>
+                      <a:pPr rtl="1" algn="ctr" indent="0" marL="0">
+                        <a:buNone/>
+                      </a:pPr>
+                      <a:r>
+                        <a:rPr lang="en-US" sz="1050" dirty="0">
+                          <a:solidFill>
+                            <a:srgbClr val="0F172A"/>
+                          </a:solidFill>
+                          <a:latin typeface="Arial" pitchFamily="34" charset="0"/>
+                          <a:ea typeface="Arial" pitchFamily="34" charset="-122"/>
+                          <a:cs typeface="Arial" pitchFamily="34" charset="-120"/>
+                        </a:rPr>
+                        <a:t>הלקוח לבד</a:t>
+                      </a:r>
+                      <a:endParaRPr lang="en-US" sz="1050" dirty="0">
+                        <a:latin typeface="Arial" charset="0"/>
+                        <a:ea typeface="Arial" charset="0"/>
+                        <a:cs typeface="Arial" charset="0"/>
+                      </a:endParaRPr>
+                    </a:p>
+                  </a:txBody>
+                  <a:tcPr marL="91440" marR="91440" marT="45720" marB="45720" anchor="ctr">
+                    <a:lnL w="6350" cap="flat" cmpd="sng" algn="ctr">
+                      <a:solidFill>
+                        <a:srgbClr val="E2E8F0"/>
+                      </a:solidFill>
+                      <a:prstDash val="solid"/>
+                      <a:round/>
+                      <a:headEnd type="none" w="med" len="med"/>
+                      <a:tailEnd type="none" w="med" len="med"/>
+                    </a:lnL>
+                    <a:lnR w="6350" cap="flat" cmpd="sng" algn="ctr">
+                      <a:solidFill>
+                        <a:srgbClr val="E2E8F0"/>
+                      </a:solidFill>
+                      <a:prstDash val="solid"/>
+                      <a:round/>
+                      <a:headEnd type="none" w="med" len="med"/>
+                      <a:tailEnd type="none" w="med" len="med"/>
+                    </a:lnR>
+                    <a:lnT w="6350" cap="flat" cmpd="sng" algn="ctr">
+                      <a:solidFill>
+                        <a:srgbClr val="E2E8F0"/>
+                      </a:solidFill>
+                      <a:prstDash val="solid"/>
+                      <a:round/>
+                      <a:headEnd type="none" w="med" len="med"/>
+                      <a:tailEnd type="none" w="med" len="med"/>
+                    </a:lnT>
+                    <a:lnB w="6350" cap="flat" cmpd="sng" algn="ctr">
+                      <a:solidFill>
+                        <a:srgbClr val="E2E8F0"/>
+                      </a:solidFill>
+                      <a:prstDash val="solid"/>
+                      <a:round/>
+                      <a:headEnd type="none" w="med" len="med"/>
+                      <a:tailEnd type="none" w="med" len="med"/>
+                    </a:lnB>
+                    <a:solidFill>
+                      <a:srgbClr val="FBFAF7"/>
+                    </a:solidFill>
+                  </a:tcPr>
+                </a:tc>
+                <a:tc>
+                  <a:txBody>
+                    <a:bodyPr/>
+                    <a:lstStyle/>
+                    <a:p>
+                      <a:pPr rtl="1" algn="ctr" indent="0" marL="0">
+                        <a:buNone/>
+                      </a:pPr>
+                      <a:r>
+                        <a:rPr lang="en-US" sz="1050" dirty="0">
+                          <a:solidFill>
+                            <a:srgbClr val="0F172A"/>
+                          </a:solidFill>
+                          <a:latin typeface="Arial" pitchFamily="34" charset="0"/>
+                          <a:ea typeface="Arial" pitchFamily="34" charset="-122"/>
+                          <a:cs typeface="Arial" pitchFamily="34" charset="-120"/>
+                        </a:rPr>
+                        <a:t>הלקוח לבד</a:t>
+                      </a:r>
+                      <a:endParaRPr lang="en-US" sz="1050" dirty="0">
+                        <a:latin typeface="Arial" charset="0"/>
+                        <a:ea typeface="Arial" charset="0"/>
+                        <a:cs typeface="Arial" charset="0"/>
+                      </a:endParaRPr>
+                    </a:p>
+                  </a:txBody>
+                  <a:tcPr marL="91440" marR="91440" marT="45720" marB="45720" anchor="ctr">
+                    <a:lnL w="6350" cap="flat" cmpd="sng" algn="ctr">
+                      <a:solidFill>
+                        <a:srgbClr val="E2E8F0"/>
+                      </a:solidFill>
+                      <a:prstDash val="solid"/>
+                      <a:round/>
+                      <a:headEnd type="none" w="med" len="med"/>
+                      <a:tailEnd type="none" w="med" len="med"/>
+                    </a:lnL>
+                    <a:lnR w="6350" cap="flat" cmpd="sng" algn="ctr">
+                      <a:solidFill>
+                        <a:srgbClr val="E2E8F0"/>
+                      </a:solidFill>
+                      <a:prstDash val="solid"/>
+                      <a:round/>
+                      <a:headEnd type="none" w="med" len="med"/>
+                      <a:tailEnd type="none" w="med" len="med"/>
+                    </a:lnR>
+                    <a:lnT w="6350" cap="flat" cmpd="sng" algn="ctr">
+                      <a:solidFill>
+                        <a:srgbClr val="E2E8F0"/>
+                      </a:solidFill>
+                      <a:prstDash val="solid"/>
+                      <a:round/>
+                      <a:headEnd type="none" w="med" len="med"/>
+                      <a:tailEnd type="none" w="med" len="med"/>
+                    </a:lnT>
+                    <a:lnB w="6350" cap="flat" cmpd="sng" algn="ctr">
+                      <a:solidFill>
+                        <a:srgbClr val="E2E8F0"/>
+                      </a:solidFill>
+                      <a:prstDash val="solid"/>
+                      <a:round/>
+                      <a:headEnd type="none" w="med" len="med"/>
+                      <a:tailEnd type="none" w="med" len="med"/>
+                    </a:lnB>
+                    <a:solidFill>
+                      <a:srgbClr val="FBFAF7"/>
+                    </a:solidFill>
+                  </a:tcPr>
+                </a:tc>
+              </a:tr>
             </a:tbl>
           </a:graphicData>
         </a:graphic>
@@ -6353,7 +5492,7 @@
                 <a:ea typeface="Arial" pitchFamily="34" charset="-122"/>
                 <a:cs typeface="Arial" pitchFamily="34" charset="-120"/>
               </a:rPr>
-              <a:t>12 / 14</a:t>
+              <a:t>11 / 12</a:t>
             </a:r>
             <a:endParaRPr lang="en-US" sz="1000" dirty="0"/>
           </a:p>
@@ -6367,9 +5506,9 @@
 </p:sld>
 </file>
 
-<file path=ppt/slides/slide13.xml><?xml version="1.0" encoding="utf-8"?>
+<file path=ppt/slides/slide12.xml><?xml version="1.0" encoding="utf-8"?>
 <p:sld xmlns:a="http://schemas.openxmlformats.org/drawingml/2006/main" xmlns:r="http://schemas.openxmlformats.org/officeDocument/2006/relationships" xmlns:p="http://schemas.openxmlformats.org/presentationml/2006/main">
-  <p:cSld name="Slide 13">
+  <p:cSld name="Slide 12">
     <p:bg>
       <p:bgPr>
         <a:solidFill>
@@ -7426,492 +6565,9 @@
                 <a:ea typeface="Arial" pitchFamily="34" charset="-122"/>
                 <a:cs typeface="Arial" pitchFamily="34" charset="-120"/>
               </a:rPr>
-              <a:t>13 / 14</a:t>
+              <a:t>12 / 12</a:t>
             </a:r>
             <a:endParaRPr lang="en-US" sz="1000" dirty="0"/>
-          </a:p>
-        </p:txBody>
-      </p:sp>
-    </p:spTree>
-  </p:cSld>
-  <p:clrMapOvr>
-    <a:masterClrMapping/>
-  </p:clrMapOvr>
-</p:sld>
-</file>
-
-<file path=ppt/slides/slide14.xml><?xml version="1.0" encoding="utf-8"?>
-<p:sld xmlns:a="http://schemas.openxmlformats.org/drawingml/2006/main" xmlns:r="http://schemas.openxmlformats.org/officeDocument/2006/relationships" xmlns:p="http://schemas.openxmlformats.org/presentationml/2006/main">
-  <p:cSld name="Slide 14">
-    <p:bg>
-      <p:bgPr>
-        <a:solidFill>
-          <a:srgbClr val="0A0B2E"/>
-        </a:solidFill>
-      </p:bgPr>
-    </p:bg>
-    <p:spTree>
-      <p:nvGrpSpPr>
-        <p:cNvPr id="1" name=""/>
-        <p:cNvGrpSpPr/>
-        <p:nvPr/>
-      </p:nvGrpSpPr>
-      <p:grpSpPr>
-        <a:xfrm>
-          <a:off x="0" y="0"/>
-          <a:ext cx="0" cy="0"/>
-          <a:chOff x="0" y="0"/>
-          <a:chExt cx="0" cy="0"/>
-        </a:xfrm>
-      </p:grpSpPr>
-      <p:sp>
-        <p:nvSpPr>
-          <p:cNvPr id="2" name="Text 0"/>
-          <p:cNvSpPr/>
-          <p:nvPr/>
-        </p:nvSpPr>
-        <p:spPr>
-          <a:xfrm>
-            <a:off x="0" y="1463040"/>
-            <a:ext cx="9144000" cy="3017520"/>
-          </a:xfrm>
-          <a:prstGeom prst="rect">
-            <a:avLst/>
-          </a:prstGeom>
-          <a:noFill/>
-          <a:ln/>
-        </p:spPr>
-        <p:txBody>
-          <a:bodyPr wrap="square" lIns="0" tIns="0" rIns="0" bIns="0" rtlCol="0" anchor="ctr"/>
-          <a:lstStyle/>
-          <a:p>
-            <a:pPr algn="ctr" indent="0" marL="0">
-              <a:buNone/>
-            </a:pPr>
-            <a:r>
-              <a:rPr lang="en-US" sz="24000" b="1" spc="-600" kern="0" dirty="0">
-                <a:solidFill>
-                  <a:srgbClr val="2D2F6E"/>
-                </a:solidFill>
-                <a:latin typeface="Rubik" pitchFamily="34" charset="0"/>
-                <a:ea typeface="Rubik" pitchFamily="34" charset="-122"/>
-                <a:cs typeface="Rubik" pitchFamily="34" charset="-120"/>
-              </a:rPr>
-              <a:t>fixly</a:t>
-            </a:r>
-            <a:endParaRPr lang="en-US" sz="24000" dirty="0"/>
-          </a:p>
-        </p:txBody>
-      </p:sp>
-      <p:sp>
-        <p:nvSpPr>
-          <p:cNvPr id="3" name="Text 1"/>
-          <p:cNvSpPr/>
-          <p:nvPr/>
-        </p:nvSpPr>
-        <p:spPr>
-          <a:xfrm>
-            <a:off x="457200" y="502920"/>
-            <a:ext cx="8229600" cy="822960"/>
-          </a:xfrm>
-          <a:prstGeom prst="rect">
-            <a:avLst/>
-          </a:prstGeom>
-          <a:noFill/>
-          <a:ln/>
-        </p:spPr>
-        <p:txBody>
-          <a:bodyPr wrap="square" lIns="0" tIns="0" rIns="0" bIns="0" rtlCol="0" anchor="ctr"/>
-          <a:lstStyle/>
-          <a:p>
-            <a:pPr rtl="1" algn="r" indent="0" marL="0">
-              <a:buNone/>
-            </a:pPr>
-            <a:r>
-              <a:rPr lang="en-US" sz="4200" b="1" dirty="0">
-                <a:solidFill>
-                  <a:srgbClr val="FBFAF7"/>
-                </a:solidFill>
-                <a:latin typeface="Rubik" pitchFamily="34" charset="0"/>
-                <a:ea typeface="Rubik" pitchFamily="34" charset="-122"/>
-                <a:cs typeface="Rubik" pitchFamily="34" charset="-120"/>
-              </a:rPr>
-              <a:t>הבקשה.</a:t>
-            </a:r>
-            <a:endParaRPr lang="en-US" sz="4200" dirty="0"/>
-          </a:p>
-        </p:txBody>
-      </p:sp>
-      <p:sp>
-        <p:nvSpPr>
-          <p:cNvPr id="4" name="Shape 2"/>
-          <p:cNvSpPr/>
-          <p:nvPr/>
-        </p:nvSpPr>
-        <p:spPr>
-          <a:xfrm>
-            <a:off x="7772400" y="1325880"/>
-            <a:ext cx="914400" cy="54864"/>
-          </a:xfrm>
-          <a:prstGeom prst="rect">
-            <a:avLst/>
-          </a:prstGeom>
-          <a:solidFill>
-            <a:srgbClr val="E5B77A"/>
-          </a:solidFill>
-          <a:ln w="12700">
-            <a:solidFill>
-              <a:srgbClr val="E5B77A"/>
-            </a:solidFill>
-            <a:prstDash val="solid"/>
-          </a:ln>
-        </p:spPr>
-      </p:sp>
-      <p:sp>
-        <p:nvSpPr>
-          <p:cNvPr id="5" name="Shape 3"/>
-          <p:cNvSpPr/>
-          <p:nvPr/>
-        </p:nvSpPr>
-        <p:spPr>
-          <a:xfrm>
-            <a:off x="8412480" y="1920240"/>
-            <a:ext cx="91440" cy="749808"/>
-          </a:xfrm>
-          <a:prstGeom prst="rect">
-            <a:avLst/>
-          </a:prstGeom>
-          <a:solidFill>
-            <a:srgbClr val="E5B77A"/>
-          </a:solidFill>
-          <a:ln w="12700">
-            <a:solidFill>
-              <a:srgbClr val="E5B77A"/>
-            </a:solidFill>
-            <a:prstDash val="solid"/>
-          </a:ln>
-        </p:spPr>
-      </p:sp>
-      <p:sp>
-        <p:nvSpPr>
-          <p:cNvPr id="6" name="Text 4"/>
-          <p:cNvSpPr/>
-          <p:nvPr/>
-        </p:nvSpPr>
-        <p:spPr>
-          <a:xfrm>
-            <a:off x="457200" y="1920240"/>
-            <a:ext cx="7818120" cy="411480"/>
-          </a:xfrm>
-          <a:prstGeom prst="rect">
-            <a:avLst/>
-          </a:prstGeom>
-          <a:noFill/>
-          <a:ln/>
-        </p:spPr>
-        <p:txBody>
-          <a:bodyPr wrap="square" lIns="0" tIns="0" rIns="0" bIns="0" rtlCol="0" anchor="ctr"/>
-          <a:lstStyle/>
-          <a:p>
-            <a:pPr rtl="1" algn="r" indent="0" marL="0">
-              <a:buNone/>
-            </a:pPr>
-            <a:r>
-              <a:rPr lang="en-US" sz="2400" b="1" dirty="0">
-                <a:solidFill>
-                  <a:srgbClr val="E5B77A"/>
-                </a:solidFill>
-                <a:latin typeface="Rubik" pitchFamily="34" charset="0"/>
-                <a:ea typeface="Rubik" pitchFamily="34" charset="-122"/>
-                <a:cs typeface="Rubik" pitchFamily="34" charset="-120"/>
-              </a:rPr>
-              <a:t>$1.5M סיד</a:t>
-            </a:r>
-            <a:endParaRPr lang="en-US" sz="2400" dirty="0"/>
-          </a:p>
-        </p:txBody>
-      </p:sp>
-      <p:sp>
-        <p:nvSpPr>
-          <p:cNvPr id="7" name="Text 5"/>
-          <p:cNvSpPr/>
-          <p:nvPr/>
-        </p:nvSpPr>
-        <p:spPr>
-          <a:xfrm>
-            <a:off x="457200" y="2331720"/>
-            <a:ext cx="7818120" cy="365760"/>
-          </a:xfrm>
-          <a:prstGeom prst="rect">
-            <a:avLst/>
-          </a:prstGeom>
-          <a:noFill/>
-          <a:ln/>
-        </p:spPr>
-        <p:txBody>
-          <a:bodyPr wrap="square" lIns="0" tIns="0" rIns="0" bIns="0" rtlCol="0" anchor="ctr"/>
-          <a:lstStyle/>
-          <a:p>
-            <a:pPr rtl="1" algn="r" indent="0" marL="0">
-              <a:buNone/>
-            </a:pPr>
-            <a:r>
-              <a:rPr lang="en-US" sz="1500" dirty="0">
-                <a:solidFill>
-                  <a:srgbClr val="E8ECFC"/>
-                </a:solidFill>
-                <a:latin typeface="Arial" pitchFamily="34" charset="0"/>
-                <a:ea typeface="Arial" pitchFamily="34" charset="-122"/>
-                <a:cs typeface="Arial" pitchFamily="34" charset="-120"/>
-              </a:rPr>
-              <a:t>ראנוויי של 18 חודשים.</a:t>
-            </a:r>
-            <a:endParaRPr lang="en-US" sz="1500" dirty="0"/>
-          </a:p>
-        </p:txBody>
-      </p:sp>
-      <p:sp>
-        <p:nvSpPr>
-          <p:cNvPr id="8" name="Shape 6"/>
-          <p:cNvSpPr/>
-          <p:nvPr/>
-        </p:nvSpPr>
-        <p:spPr>
-          <a:xfrm>
-            <a:off x="8412480" y="2788920"/>
-            <a:ext cx="91440" cy="749808"/>
-          </a:xfrm>
-          <a:prstGeom prst="rect">
-            <a:avLst/>
-          </a:prstGeom>
-          <a:solidFill>
-            <a:srgbClr val="E5B77A"/>
-          </a:solidFill>
-          <a:ln w="12700">
-            <a:solidFill>
-              <a:srgbClr val="E5B77A"/>
-            </a:solidFill>
-            <a:prstDash val="solid"/>
-          </a:ln>
-        </p:spPr>
-      </p:sp>
-      <p:sp>
-        <p:nvSpPr>
-          <p:cNvPr id="9" name="Text 7"/>
-          <p:cNvSpPr/>
-          <p:nvPr/>
-        </p:nvSpPr>
-        <p:spPr>
-          <a:xfrm>
-            <a:off x="457200" y="2788920"/>
-            <a:ext cx="7818120" cy="411480"/>
-          </a:xfrm>
-          <a:prstGeom prst="rect">
-            <a:avLst/>
-          </a:prstGeom>
-          <a:noFill/>
-          <a:ln/>
-        </p:spPr>
-        <p:txBody>
-          <a:bodyPr wrap="square" lIns="0" tIns="0" rIns="0" bIns="0" rtlCol="0" anchor="ctr"/>
-          <a:lstStyle/>
-          <a:p>
-            <a:pPr rtl="1" algn="r" indent="0" marL="0">
-              <a:buNone/>
-            </a:pPr>
-            <a:r>
-              <a:rPr lang="en-US" sz="2400" b="1" dirty="0">
-                <a:solidFill>
-                  <a:srgbClr val="E5B77A"/>
-                </a:solidFill>
-                <a:latin typeface="Rubik" pitchFamily="34" charset="0"/>
-                <a:ea typeface="Rubik" pitchFamily="34" charset="-122"/>
-                <a:cs typeface="Rubik" pitchFamily="34" charset="-120"/>
-              </a:rPr>
-              <a:t>פיילוט גוש דן</a:t>
-            </a:r>
-            <a:endParaRPr lang="en-US" sz="2400" dirty="0"/>
-          </a:p>
-        </p:txBody>
-      </p:sp>
-      <p:sp>
-        <p:nvSpPr>
-          <p:cNvPr id="10" name="Text 8"/>
-          <p:cNvSpPr/>
-          <p:nvPr/>
-        </p:nvSpPr>
-        <p:spPr>
-          <a:xfrm>
-            <a:off x="457200" y="3200400"/>
-            <a:ext cx="7818120" cy="365760"/>
-          </a:xfrm>
-          <a:prstGeom prst="rect">
-            <a:avLst/>
-          </a:prstGeom>
-          <a:noFill/>
-          <a:ln/>
-        </p:spPr>
-        <p:txBody>
-          <a:bodyPr wrap="square" lIns="0" tIns="0" rIns="0" bIns="0" rtlCol="0" anchor="ctr"/>
-          <a:lstStyle/>
-          <a:p>
-            <a:pPr rtl="1" algn="r" indent="0" marL="0">
-              <a:buNone/>
-            </a:pPr>
-            <a:r>
-              <a:rPr lang="en-US" sz="1500" dirty="0">
-                <a:solidFill>
-                  <a:srgbClr val="E8ECFC"/>
-                </a:solidFill>
-                <a:latin typeface="Arial" pitchFamily="34" charset="0"/>
-                <a:ea typeface="Arial" pitchFamily="34" charset="-122"/>
-                <a:cs typeface="Arial" pitchFamily="34" charset="-120"/>
-              </a:rPr>
-              <a:t>500 עבודות ראשונות, 200 בעלי מקצוע משלמים.</a:t>
-            </a:r>
-            <a:endParaRPr lang="en-US" sz="1500" dirty="0"/>
-          </a:p>
-        </p:txBody>
-      </p:sp>
-      <p:sp>
-        <p:nvSpPr>
-          <p:cNvPr id="11" name="Shape 9"/>
-          <p:cNvSpPr/>
-          <p:nvPr/>
-        </p:nvSpPr>
-        <p:spPr>
-          <a:xfrm>
-            <a:off x="8412480" y="3657600"/>
-            <a:ext cx="91440" cy="749808"/>
-          </a:xfrm>
-          <a:prstGeom prst="rect">
-            <a:avLst/>
-          </a:prstGeom>
-          <a:solidFill>
-            <a:srgbClr val="E5B77A"/>
-          </a:solidFill>
-          <a:ln w="12700">
-            <a:solidFill>
-              <a:srgbClr val="E5B77A"/>
-            </a:solidFill>
-            <a:prstDash val="solid"/>
-          </a:ln>
-        </p:spPr>
-      </p:sp>
-      <p:sp>
-        <p:nvSpPr>
-          <p:cNvPr id="12" name="Text 10"/>
-          <p:cNvSpPr/>
-          <p:nvPr/>
-        </p:nvSpPr>
-        <p:spPr>
-          <a:xfrm>
-            <a:off x="457200" y="3657600"/>
-            <a:ext cx="7818120" cy="411480"/>
-          </a:xfrm>
-          <a:prstGeom prst="rect">
-            <a:avLst/>
-          </a:prstGeom>
-          <a:noFill/>
-          <a:ln/>
-        </p:spPr>
-        <p:txBody>
-          <a:bodyPr wrap="square" lIns="0" tIns="0" rIns="0" bIns="0" rtlCol="0" anchor="ctr"/>
-          <a:lstStyle/>
-          <a:p>
-            <a:pPr rtl="1" algn="r" indent="0" marL="0">
-              <a:buNone/>
-            </a:pPr>
-            <a:r>
-              <a:rPr lang="en-US" sz="2400" b="1" dirty="0">
-                <a:solidFill>
-                  <a:srgbClr val="E5B77A"/>
-                </a:solidFill>
-                <a:latin typeface="Rubik" pitchFamily="34" charset="0"/>
-                <a:ea typeface="Rubik" pitchFamily="34" charset="-122"/>
-                <a:cs typeface="Rubik" pitchFamily="34" charset="-120"/>
-              </a:rPr>
-              <a:t>אחר כך שרון + חיפה</a:t>
-            </a:r>
-            <a:endParaRPr lang="en-US" sz="2400" dirty="0"/>
-          </a:p>
-        </p:txBody>
-      </p:sp>
-      <p:sp>
-        <p:nvSpPr>
-          <p:cNvPr id="13" name="Text 11"/>
-          <p:cNvSpPr/>
-          <p:nvPr/>
-        </p:nvSpPr>
-        <p:spPr>
-          <a:xfrm>
-            <a:off x="457200" y="4069080"/>
-            <a:ext cx="7818120" cy="365760"/>
-          </a:xfrm>
-          <a:prstGeom prst="rect">
-            <a:avLst/>
-          </a:prstGeom>
-          <a:noFill/>
-          <a:ln/>
-        </p:spPr>
-        <p:txBody>
-          <a:bodyPr wrap="square" lIns="0" tIns="0" rIns="0" bIns="0" rtlCol="0" anchor="ctr"/>
-          <a:lstStyle/>
-          <a:p>
-            <a:pPr rtl="1" algn="r" indent="0" marL="0">
-              <a:buNone/>
-            </a:pPr>
-            <a:r>
-              <a:rPr lang="en-US" sz="1500" dirty="0">
-                <a:solidFill>
-                  <a:srgbClr val="E8ECFC"/>
-                </a:solidFill>
-                <a:latin typeface="Arial" pitchFamily="34" charset="0"/>
-                <a:ea typeface="Arial" pitchFamily="34" charset="-122"/>
-                <a:cs typeface="Arial" pitchFamily="34" charset="-120"/>
-              </a:rPr>
-              <a:t>עיר חדשה כל רבעון אחרי Product-Market Fit.</a:t>
-            </a:r>
-            <a:endParaRPr lang="en-US" sz="1500" dirty="0"/>
-          </a:p>
-        </p:txBody>
-      </p:sp>
-      <p:sp>
-        <p:nvSpPr>
-          <p:cNvPr id="14" name="Text 12"/>
-          <p:cNvSpPr/>
-          <p:nvPr/>
-        </p:nvSpPr>
-        <p:spPr>
-          <a:xfrm>
-            <a:off x="457200" y="4617720"/>
-            <a:ext cx="8229600" cy="365760"/>
-          </a:xfrm>
-          <a:prstGeom prst="rect">
-            <a:avLst/>
-          </a:prstGeom>
-          <a:noFill/>
-          <a:ln/>
-        </p:spPr>
-        <p:txBody>
-          <a:bodyPr wrap="square" lIns="0" tIns="0" rIns="0" bIns="0" rtlCol="0" anchor="ctr"/>
-          <a:lstStyle/>
-          <a:p>
-            <a:pPr algn="ctr" indent="0" marL="0">
-              <a:buNone/>
-            </a:pPr>
-            <a:r>
-              <a:rPr lang="en-US" sz="1300" dirty="0">
-                <a:solidFill>
-                  <a:srgbClr val="E8ECFC"/>
-                </a:solidFill>
-                <a:latin typeface="Arial" pitchFamily="34" charset="0"/>
-                <a:ea typeface="Arial" pitchFamily="34" charset="-122"/>
-                <a:cs typeface="Arial" pitchFamily="34" charset="-120"/>
-              </a:rPr>
-              <a:t>roee@ai-fixly.com  ·  ai-fixly-web.pages.dev</a:t>
-            </a:r>
-            <a:endParaRPr lang="en-US" sz="1300" dirty="0"/>
           </a:p>
         </p:txBody>
       </p:sp>
@@ -8923,7 +7579,7 @@
                 <a:ea typeface="Arial" pitchFamily="34" charset="-122"/>
                 <a:cs typeface="Arial" pitchFamily="34" charset="-120"/>
               </a:rPr>
-              <a:t>2 / 14</a:t>
+              <a:t>2 / 12</a:t>
             </a:r>
             <a:endParaRPr lang="en-US" sz="1000" dirty="0"/>
           </a:p>
@@ -9669,7 +8325,7 @@
                 <a:ea typeface="Arial" pitchFamily="34" charset="-122"/>
                 <a:cs typeface="Arial" pitchFamily="34" charset="-120"/>
               </a:rPr>
-              <a:t>3 / 14</a:t>
+              <a:t>3 / 12</a:t>
             </a:r>
             <a:endParaRPr lang="en-US" sz="1000" dirty="0"/>
           </a:p>
@@ -10181,7 +8837,7 @@
                 <a:ea typeface="Arial" pitchFamily="34" charset="-122"/>
                 <a:cs typeface="Arial" pitchFamily="34" charset="-120"/>
               </a:rPr>
-              <a:t>4 / 14</a:t>
+              <a:t>4 / 12</a:t>
             </a:r>
             <a:endParaRPr lang="en-US" sz="1000" dirty="0"/>
           </a:p>
@@ -11049,7 +9705,7 @@
                 <a:ea typeface="Arial" pitchFamily="34" charset="-122"/>
                 <a:cs typeface="Arial" pitchFamily="34" charset="-120"/>
               </a:rPr>
-              <a:t>5 / 14</a:t>
+              <a:t>5 / 12</a:t>
             </a:r>
             <a:endParaRPr lang="en-US" sz="1000" dirty="0"/>
           </a:p>
@@ -11888,7 +10544,7 @@
                 <a:ea typeface="Arial" pitchFamily="34" charset="-122"/>
                 <a:cs typeface="Arial" pitchFamily="34" charset="-120"/>
               </a:rPr>
-              <a:t>6 / 14</a:t>
+              <a:t>6 / 12</a:t>
             </a:r>
             <a:endParaRPr lang="en-US" sz="1000" dirty="0"/>
           </a:p>
@@ -12973,7 +11629,7 @@
                 <a:ea typeface="Arial" pitchFamily="34" charset="-122"/>
                 <a:cs typeface="Arial" pitchFamily="34" charset="-120"/>
               </a:rPr>
-              <a:t>7 / 14</a:t>
+              <a:t>7 / 12</a:t>
             </a:r>
             <a:endParaRPr lang="en-US" sz="1000" dirty="0"/>
           </a:p>
@@ -14040,7 +12696,7 @@
                 <a:ea typeface="Arial" pitchFamily="34" charset="-122"/>
                 <a:cs typeface="Arial" pitchFamily="34" charset="-120"/>
               </a:rPr>
-              <a:t>8 / 14</a:t>
+              <a:t>8 / 12</a:t>
             </a:r>
             <a:endParaRPr lang="en-US" sz="1000" dirty="0"/>
           </a:p>
@@ -14943,7 +13599,7 @@
                 <a:ea typeface="Arial" pitchFamily="34" charset="-122"/>
                 <a:cs typeface="Arial" pitchFamily="34" charset="-120"/>
               </a:rPr>
-              <a:t>9 / 14</a:t>
+              <a:t>9 / 12</a:t>
             </a:r>
             <a:endParaRPr lang="en-US" sz="1000" dirty="0"/>
           </a:p>
